--- a/Figures/Figure S1.pptx
+++ b/Figures/Figure S1.pptx
@@ -2,12 +2,12 @@
 <file path=ppt/presentation.xml><?xml version="1.0" encoding="utf-8"?>
 <p:presentation xmlns:a="http://schemas.openxmlformats.org/drawingml/2006/main" xmlns:r="http://schemas.openxmlformats.org/officeDocument/2006/relationships" xmlns:p="http://schemas.openxmlformats.org/presentationml/2006/main" saveSubsetFonts="1">
   <p:sldMasterIdLst>
-    <p:sldMasterId id="2147483660" r:id="rId1"/>
+    <p:sldMasterId id="2147483696" r:id="rId1"/>
   </p:sldMasterIdLst>
   <p:sldIdLst>
-    <p:sldId id="256" r:id="rId2"/>
+    <p:sldId id="257" r:id="rId2"/>
   </p:sldIdLst>
-  <p:sldSz cx="6858000" cy="12192000"/>
+  <p:sldSz cx="6858000" cy="7772400"/>
   <p:notesSz cx="6858000" cy="9144000"/>
   <p:defaultTextStyle>
     <a:defPPr>
@@ -104,6 +104,11 @@
       </a:defRPr>
     </a:lvl9pPr>
   </p:defaultTextStyle>
+  <p:extLst>
+    <p:ext uri="{EFAFB233-063F-42B5-8137-9DF3F51BA10A}">
+      <p15:sldGuideLst xmlns:p15="http://schemas.microsoft.com/office/powerpoint/2012/main"/>
+    </p:ext>
+  </p:extLst>
 </p:presentation>
 </file>
 
@@ -136,8 +141,8 @@
         </p:nvSpPr>
         <p:spPr>
           <a:xfrm>
-            <a:off x="514350" y="1995312"/>
-            <a:ext cx="5829300" cy="4244622"/>
+            <a:off x="514350" y="1272011"/>
+            <a:ext cx="5829300" cy="2705947"/>
           </a:xfrm>
         </p:spPr>
         <p:txBody>
@@ -168,8 +173,8 @@
         </p:nvSpPr>
         <p:spPr>
           <a:xfrm>
-            <a:off x="857250" y="6403623"/>
-            <a:ext cx="5143500" cy="2943577"/>
+            <a:off x="857250" y="4082310"/>
+            <a:ext cx="5143500" cy="1876530"/>
           </a:xfrm>
         </p:spPr>
         <p:txBody>
@@ -238,7 +243,7 @@
           <a:p>
             <a:fld id="{5BA77239-3AD1-4818-ADF0-0E18FF0CF020}" type="datetimeFigureOut">
               <a:rPr lang="en-GB" smtClean="0"/>
-              <a:t>14/01/2024</a:t>
+              <a:t>18/02/2024</a:t>
             </a:fld>
             <a:endParaRPr lang="en-GB"/>
           </a:p>
@@ -289,7 +294,7 @@
     </p:spTree>
     <p:extLst>
       <p:ext uri="{BB962C8B-B14F-4D97-AF65-F5344CB8AC3E}">
-        <p14:creationId xmlns:p14="http://schemas.microsoft.com/office/powerpoint/2010/main" val="177604739"/>
+        <p14:creationId xmlns:p14="http://schemas.microsoft.com/office/powerpoint/2010/main" val="170144497"/>
       </p:ext>
     </p:extLst>
   </p:cSld>
@@ -408,7 +413,7 @@
           <a:p>
             <a:fld id="{5BA77239-3AD1-4818-ADF0-0E18FF0CF020}" type="datetimeFigureOut">
               <a:rPr lang="en-GB" smtClean="0"/>
-              <a:t>14/01/2024</a:t>
+              <a:t>18/02/2024</a:t>
             </a:fld>
             <a:endParaRPr lang="en-GB"/>
           </a:p>
@@ -459,7 +464,7 @@
     </p:spTree>
     <p:extLst>
       <p:ext uri="{BB962C8B-B14F-4D97-AF65-F5344CB8AC3E}">
-        <p14:creationId xmlns:p14="http://schemas.microsoft.com/office/powerpoint/2010/main" val="4016117342"/>
+        <p14:creationId xmlns:p14="http://schemas.microsoft.com/office/powerpoint/2010/main" val="2251802843"/>
       </p:ext>
     </p:extLst>
   </p:cSld>
@@ -498,8 +503,8 @@
         </p:nvSpPr>
         <p:spPr>
           <a:xfrm>
-            <a:off x="4907757" y="649111"/>
-            <a:ext cx="1478756" cy="10332156"/>
+            <a:off x="4907757" y="413808"/>
+            <a:ext cx="1478756" cy="6586750"/>
           </a:xfrm>
         </p:spPr>
         <p:txBody>
@@ -526,8 +531,8 @@
         </p:nvSpPr>
         <p:spPr>
           <a:xfrm>
-            <a:off x="471488" y="649111"/>
-            <a:ext cx="4350544" cy="10332156"/>
+            <a:off x="471488" y="413808"/>
+            <a:ext cx="4350544" cy="6586750"/>
           </a:xfrm>
         </p:spPr>
         <p:txBody>
@@ -588,7 +593,7 @@
           <a:p>
             <a:fld id="{5BA77239-3AD1-4818-ADF0-0E18FF0CF020}" type="datetimeFigureOut">
               <a:rPr lang="en-GB" smtClean="0"/>
-              <a:t>14/01/2024</a:t>
+              <a:t>18/02/2024</a:t>
             </a:fld>
             <a:endParaRPr lang="en-GB"/>
           </a:p>
@@ -639,7 +644,7 @@
     </p:spTree>
     <p:extLst>
       <p:ext uri="{BB962C8B-B14F-4D97-AF65-F5344CB8AC3E}">
-        <p14:creationId xmlns:p14="http://schemas.microsoft.com/office/powerpoint/2010/main" val="4008703993"/>
+        <p14:creationId xmlns:p14="http://schemas.microsoft.com/office/powerpoint/2010/main" val="2311055941"/>
       </p:ext>
     </p:extLst>
   </p:cSld>
@@ -758,7 +763,7 @@
           <a:p>
             <a:fld id="{5BA77239-3AD1-4818-ADF0-0E18FF0CF020}" type="datetimeFigureOut">
               <a:rPr lang="en-GB" smtClean="0"/>
-              <a:t>14/01/2024</a:t>
+              <a:t>18/02/2024</a:t>
             </a:fld>
             <a:endParaRPr lang="en-GB"/>
           </a:p>
@@ -809,7 +814,7 @@
     </p:spTree>
     <p:extLst>
       <p:ext uri="{BB962C8B-B14F-4D97-AF65-F5344CB8AC3E}">
-        <p14:creationId xmlns:p14="http://schemas.microsoft.com/office/powerpoint/2010/main" val="4139442065"/>
+        <p14:creationId xmlns:p14="http://schemas.microsoft.com/office/powerpoint/2010/main" val="1132391428"/>
       </p:ext>
     </p:extLst>
   </p:cSld>
@@ -848,8 +853,8 @@
         </p:nvSpPr>
         <p:spPr>
           <a:xfrm>
-            <a:off x="467916" y="3039537"/>
-            <a:ext cx="5915025" cy="5071532"/>
+            <a:off x="467916" y="1937705"/>
+            <a:ext cx="5915025" cy="3233102"/>
           </a:xfrm>
         </p:spPr>
         <p:txBody>
@@ -880,8 +885,8 @@
         </p:nvSpPr>
         <p:spPr>
           <a:xfrm>
-            <a:off x="467916" y="8159048"/>
-            <a:ext cx="5915025" cy="2666999"/>
+            <a:off x="467916" y="5201393"/>
+            <a:ext cx="5915025" cy="1700212"/>
           </a:xfrm>
         </p:spPr>
         <p:txBody>
@@ -1002,7 +1007,7 @@
           <a:p>
             <a:fld id="{5BA77239-3AD1-4818-ADF0-0E18FF0CF020}" type="datetimeFigureOut">
               <a:rPr lang="en-GB" smtClean="0"/>
-              <a:t>14/01/2024</a:t>
+              <a:t>18/02/2024</a:t>
             </a:fld>
             <a:endParaRPr lang="en-GB"/>
           </a:p>
@@ -1053,7 +1058,7 @@
     </p:spTree>
     <p:extLst>
       <p:ext uri="{BB962C8B-B14F-4D97-AF65-F5344CB8AC3E}">
-        <p14:creationId xmlns:p14="http://schemas.microsoft.com/office/powerpoint/2010/main" val="2258059523"/>
+        <p14:creationId xmlns:p14="http://schemas.microsoft.com/office/powerpoint/2010/main" val="619602027"/>
       </p:ext>
     </p:extLst>
   </p:cSld>
@@ -1115,8 +1120,8 @@
         </p:nvSpPr>
         <p:spPr>
           <a:xfrm>
-            <a:off x="471488" y="3245556"/>
-            <a:ext cx="2914650" cy="7735712"/>
+            <a:off x="471488" y="2069042"/>
+            <a:ext cx="2914650" cy="4931516"/>
           </a:xfrm>
         </p:spPr>
         <p:txBody>
@@ -1172,8 +1177,8 @@
         </p:nvSpPr>
         <p:spPr>
           <a:xfrm>
-            <a:off x="3471863" y="3245556"/>
-            <a:ext cx="2914650" cy="7735712"/>
+            <a:off x="3471863" y="2069042"/>
+            <a:ext cx="2914650" cy="4931516"/>
           </a:xfrm>
         </p:spPr>
         <p:txBody>
@@ -1234,7 +1239,7 @@
           <a:p>
             <a:fld id="{5BA77239-3AD1-4818-ADF0-0E18FF0CF020}" type="datetimeFigureOut">
               <a:rPr lang="en-GB" smtClean="0"/>
-              <a:t>14/01/2024</a:t>
+              <a:t>18/02/2024</a:t>
             </a:fld>
             <a:endParaRPr lang="en-GB"/>
           </a:p>
@@ -1285,7 +1290,7 @@
     </p:spTree>
     <p:extLst>
       <p:ext uri="{BB962C8B-B14F-4D97-AF65-F5344CB8AC3E}">
-        <p14:creationId xmlns:p14="http://schemas.microsoft.com/office/powerpoint/2010/main" val="2324130847"/>
+        <p14:creationId xmlns:p14="http://schemas.microsoft.com/office/powerpoint/2010/main" val="3548338783"/>
       </p:ext>
     </p:extLst>
   </p:cSld>
@@ -1324,8 +1329,8 @@
         </p:nvSpPr>
         <p:spPr>
           <a:xfrm>
-            <a:off x="472381" y="649114"/>
-            <a:ext cx="5915025" cy="2356556"/>
+            <a:off x="472381" y="413810"/>
+            <a:ext cx="5915025" cy="1502305"/>
           </a:xfrm>
         </p:spPr>
         <p:txBody>
@@ -1352,8 +1357,8 @@
         </p:nvSpPr>
         <p:spPr>
           <a:xfrm>
-            <a:off x="472381" y="2988734"/>
-            <a:ext cx="2901255" cy="1464732"/>
+            <a:off x="472381" y="1905318"/>
+            <a:ext cx="2901255" cy="933767"/>
           </a:xfrm>
         </p:spPr>
         <p:txBody>
@@ -1417,8 +1422,8 @@
         </p:nvSpPr>
         <p:spPr>
           <a:xfrm>
-            <a:off x="472381" y="4453467"/>
-            <a:ext cx="2901255" cy="6550379"/>
+            <a:off x="472381" y="2839085"/>
+            <a:ext cx="2901255" cy="4175866"/>
           </a:xfrm>
         </p:spPr>
         <p:txBody>
@@ -1474,8 +1479,8 @@
         </p:nvSpPr>
         <p:spPr>
           <a:xfrm>
-            <a:off x="3471863" y="2988734"/>
-            <a:ext cx="2915543" cy="1464732"/>
+            <a:off x="3471863" y="1905318"/>
+            <a:ext cx="2915543" cy="933767"/>
           </a:xfrm>
         </p:spPr>
         <p:txBody>
@@ -1539,8 +1544,8 @@
         </p:nvSpPr>
         <p:spPr>
           <a:xfrm>
-            <a:off x="3471863" y="4453467"/>
-            <a:ext cx="2915543" cy="6550379"/>
+            <a:off x="3471863" y="2839085"/>
+            <a:ext cx="2915543" cy="4175866"/>
           </a:xfrm>
         </p:spPr>
         <p:txBody>
@@ -1601,7 +1606,7 @@
           <a:p>
             <a:fld id="{5BA77239-3AD1-4818-ADF0-0E18FF0CF020}" type="datetimeFigureOut">
               <a:rPr lang="en-GB" smtClean="0"/>
-              <a:t>14/01/2024</a:t>
+              <a:t>18/02/2024</a:t>
             </a:fld>
             <a:endParaRPr lang="en-GB"/>
           </a:p>
@@ -1652,7 +1657,7 @@
     </p:spTree>
     <p:extLst>
       <p:ext uri="{BB962C8B-B14F-4D97-AF65-F5344CB8AC3E}">
-        <p14:creationId xmlns:p14="http://schemas.microsoft.com/office/powerpoint/2010/main" val="2709852613"/>
+        <p14:creationId xmlns:p14="http://schemas.microsoft.com/office/powerpoint/2010/main" val="2366722427"/>
       </p:ext>
     </p:extLst>
   </p:cSld>
@@ -1719,7 +1724,7 @@
           <a:p>
             <a:fld id="{5BA77239-3AD1-4818-ADF0-0E18FF0CF020}" type="datetimeFigureOut">
               <a:rPr lang="en-GB" smtClean="0"/>
-              <a:t>14/01/2024</a:t>
+              <a:t>18/02/2024</a:t>
             </a:fld>
             <a:endParaRPr lang="en-GB"/>
           </a:p>
@@ -1770,7 +1775,7 @@
     </p:spTree>
     <p:extLst>
       <p:ext uri="{BB962C8B-B14F-4D97-AF65-F5344CB8AC3E}">
-        <p14:creationId xmlns:p14="http://schemas.microsoft.com/office/powerpoint/2010/main" val="527920663"/>
+        <p14:creationId xmlns:p14="http://schemas.microsoft.com/office/powerpoint/2010/main" val="1821215237"/>
       </p:ext>
     </p:extLst>
   </p:cSld>
@@ -1814,7 +1819,7 @@
           <a:p>
             <a:fld id="{5BA77239-3AD1-4818-ADF0-0E18FF0CF020}" type="datetimeFigureOut">
               <a:rPr lang="en-GB" smtClean="0"/>
-              <a:t>14/01/2024</a:t>
+              <a:t>18/02/2024</a:t>
             </a:fld>
             <a:endParaRPr lang="en-GB"/>
           </a:p>
@@ -1865,7 +1870,7 @@
     </p:spTree>
     <p:extLst>
       <p:ext uri="{BB962C8B-B14F-4D97-AF65-F5344CB8AC3E}">
-        <p14:creationId xmlns:p14="http://schemas.microsoft.com/office/powerpoint/2010/main" val="3734050052"/>
+        <p14:creationId xmlns:p14="http://schemas.microsoft.com/office/powerpoint/2010/main" val="1247627690"/>
       </p:ext>
     </p:extLst>
   </p:cSld>
@@ -1904,8 +1909,8 @@
         </p:nvSpPr>
         <p:spPr>
           <a:xfrm>
-            <a:off x="472381" y="812800"/>
-            <a:ext cx="2211884" cy="2844800"/>
+            <a:off x="472381" y="518160"/>
+            <a:ext cx="2211884" cy="1813560"/>
           </a:xfrm>
         </p:spPr>
         <p:txBody>
@@ -1936,8 +1941,8 @@
         </p:nvSpPr>
         <p:spPr>
           <a:xfrm>
-            <a:off x="2915543" y="1755425"/>
-            <a:ext cx="3471863" cy="8664222"/>
+            <a:off x="2915543" y="1119083"/>
+            <a:ext cx="3471863" cy="5523442"/>
           </a:xfrm>
         </p:spPr>
         <p:txBody>
@@ -2021,8 +2026,8 @@
         </p:nvSpPr>
         <p:spPr>
           <a:xfrm>
-            <a:off x="472381" y="3657600"/>
-            <a:ext cx="2211884" cy="6776156"/>
+            <a:off x="472381" y="2331720"/>
+            <a:ext cx="2211884" cy="4319800"/>
           </a:xfrm>
         </p:spPr>
         <p:txBody>
@@ -2091,7 +2096,7 @@
           <a:p>
             <a:fld id="{5BA77239-3AD1-4818-ADF0-0E18FF0CF020}" type="datetimeFigureOut">
               <a:rPr lang="en-GB" smtClean="0"/>
-              <a:t>14/01/2024</a:t>
+              <a:t>18/02/2024</a:t>
             </a:fld>
             <a:endParaRPr lang="en-GB"/>
           </a:p>
@@ -2142,7 +2147,7 @@
     </p:spTree>
     <p:extLst>
       <p:ext uri="{BB962C8B-B14F-4D97-AF65-F5344CB8AC3E}">
-        <p14:creationId xmlns:p14="http://schemas.microsoft.com/office/powerpoint/2010/main" val="668898308"/>
+        <p14:creationId xmlns:p14="http://schemas.microsoft.com/office/powerpoint/2010/main" val="2419126410"/>
       </p:ext>
     </p:extLst>
   </p:cSld>
@@ -2181,8 +2186,8 @@
         </p:nvSpPr>
         <p:spPr>
           <a:xfrm>
-            <a:off x="472381" y="812800"/>
-            <a:ext cx="2211884" cy="2844800"/>
+            <a:off x="472381" y="518160"/>
+            <a:ext cx="2211884" cy="1813560"/>
           </a:xfrm>
         </p:spPr>
         <p:txBody>
@@ -2213,8 +2218,8 @@
         </p:nvSpPr>
         <p:spPr>
           <a:xfrm>
-            <a:off x="2915543" y="1755425"/>
-            <a:ext cx="3471863" cy="8664222"/>
+            <a:off x="2915543" y="1119083"/>
+            <a:ext cx="3471863" cy="5523442"/>
           </a:xfrm>
         </p:spPr>
         <p:txBody>
@@ -2278,8 +2283,8 @@
         </p:nvSpPr>
         <p:spPr>
           <a:xfrm>
-            <a:off x="472381" y="3657600"/>
-            <a:ext cx="2211884" cy="6776156"/>
+            <a:off x="472381" y="2331720"/>
+            <a:ext cx="2211884" cy="4319800"/>
           </a:xfrm>
         </p:spPr>
         <p:txBody>
@@ -2348,7 +2353,7 @@
           <a:p>
             <a:fld id="{5BA77239-3AD1-4818-ADF0-0E18FF0CF020}" type="datetimeFigureOut">
               <a:rPr lang="en-GB" smtClean="0"/>
-              <a:t>14/01/2024</a:t>
+              <a:t>18/02/2024</a:t>
             </a:fld>
             <a:endParaRPr lang="en-GB"/>
           </a:p>
@@ -2399,7 +2404,7 @@
     </p:spTree>
     <p:extLst>
       <p:ext uri="{BB962C8B-B14F-4D97-AF65-F5344CB8AC3E}">
-        <p14:creationId xmlns:p14="http://schemas.microsoft.com/office/powerpoint/2010/main" val="4027449982"/>
+        <p14:creationId xmlns:p14="http://schemas.microsoft.com/office/powerpoint/2010/main" val="1491252844"/>
       </p:ext>
     </p:extLst>
   </p:cSld>
@@ -2443,8 +2448,8 @@
         </p:nvSpPr>
         <p:spPr>
           <a:xfrm>
-            <a:off x="471488" y="649114"/>
-            <a:ext cx="5915025" cy="2356556"/>
+            <a:off x="471488" y="413810"/>
+            <a:ext cx="5915025" cy="1502305"/>
           </a:xfrm>
           <a:prstGeom prst="rect">
             <a:avLst/>
@@ -2476,8 +2481,8 @@
         </p:nvSpPr>
         <p:spPr>
           <a:xfrm>
-            <a:off x="471488" y="3245556"/>
-            <a:ext cx="5915025" cy="7735712"/>
+            <a:off x="471488" y="2069042"/>
+            <a:ext cx="5915025" cy="4931516"/>
           </a:xfrm>
           <a:prstGeom prst="rect">
             <a:avLst/>
@@ -2538,8 +2543,8 @@
         </p:nvSpPr>
         <p:spPr>
           <a:xfrm>
-            <a:off x="471488" y="11300181"/>
-            <a:ext cx="1543050" cy="649111"/>
+            <a:off x="471488" y="7203865"/>
+            <a:ext cx="1543050" cy="413808"/>
           </a:xfrm>
           <a:prstGeom prst="rect">
             <a:avLst/>
@@ -2561,7 +2566,7 @@
           <a:p>
             <a:fld id="{5BA77239-3AD1-4818-ADF0-0E18FF0CF020}" type="datetimeFigureOut">
               <a:rPr lang="en-GB" smtClean="0"/>
-              <a:t>14/01/2024</a:t>
+              <a:t>18/02/2024</a:t>
             </a:fld>
             <a:endParaRPr lang="en-GB"/>
           </a:p>
@@ -2579,8 +2584,8 @@
         </p:nvSpPr>
         <p:spPr>
           <a:xfrm>
-            <a:off x="2271713" y="11300181"/>
-            <a:ext cx="2314575" cy="649111"/>
+            <a:off x="2271713" y="7203865"/>
+            <a:ext cx="2314575" cy="413808"/>
           </a:xfrm>
           <a:prstGeom prst="rect">
             <a:avLst/>
@@ -2616,8 +2621,8 @@
         </p:nvSpPr>
         <p:spPr>
           <a:xfrm>
-            <a:off x="4843463" y="11300181"/>
-            <a:ext cx="1543050" cy="649111"/>
+            <a:off x="4843463" y="7203865"/>
+            <a:ext cx="1543050" cy="413808"/>
           </a:xfrm>
           <a:prstGeom prst="rect">
             <a:avLst/>
@@ -2648,23 +2653,23 @@
     </p:spTree>
     <p:extLst>
       <p:ext uri="{BB962C8B-B14F-4D97-AF65-F5344CB8AC3E}">
-        <p14:creationId xmlns:p14="http://schemas.microsoft.com/office/powerpoint/2010/main" val="2323589846"/>
+        <p14:creationId xmlns:p14="http://schemas.microsoft.com/office/powerpoint/2010/main" val="536257144"/>
       </p:ext>
     </p:extLst>
   </p:cSld>
   <p:clrMap bg1="lt1" tx1="dk1" bg2="lt2" tx2="dk2" accent1="accent1" accent2="accent2" accent3="accent3" accent4="accent4" accent5="accent5" accent6="accent6" hlink="hlink" folHlink="folHlink"/>
   <p:sldLayoutIdLst>
-    <p:sldLayoutId id="2147483661" r:id="rId1"/>
-    <p:sldLayoutId id="2147483662" r:id="rId2"/>
-    <p:sldLayoutId id="2147483663" r:id="rId3"/>
-    <p:sldLayoutId id="2147483664" r:id="rId4"/>
-    <p:sldLayoutId id="2147483665" r:id="rId5"/>
-    <p:sldLayoutId id="2147483666" r:id="rId6"/>
-    <p:sldLayoutId id="2147483667" r:id="rId7"/>
-    <p:sldLayoutId id="2147483668" r:id="rId8"/>
-    <p:sldLayoutId id="2147483669" r:id="rId9"/>
-    <p:sldLayoutId id="2147483670" r:id="rId10"/>
-    <p:sldLayoutId id="2147483671" r:id="rId11"/>
+    <p:sldLayoutId id="2147483697" r:id="rId1"/>
+    <p:sldLayoutId id="2147483698" r:id="rId2"/>
+    <p:sldLayoutId id="2147483699" r:id="rId3"/>
+    <p:sldLayoutId id="2147483700" r:id="rId4"/>
+    <p:sldLayoutId id="2147483701" r:id="rId5"/>
+    <p:sldLayoutId id="2147483702" r:id="rId6"/>
+    <p:sldLayoutId id="2147483703" r:id="rId7"/>
+    <p:sldLayoutId id="2147483704" r:id="rId8"/>
+    <p:sldLayoutId id="2147483705" r:id="rId9"/>
+    <p:sldLayoutId id="2147483706" r:id="rId10"/>
+    <p:sldLayoutId id="2147483707" r:id="rId11"/>
   </p:sldLayoutIdLst>
   <p:txStyles>
     <p:titleStyle>
@@ -2954,7 +2959,13 @@
   <p:cSld>
     <p:spTree>
       <p:nvGrpSpPr>
-        <p:cNvPr id="1" name=""/>
+        <p:cNvPr id="1" name="">
+          <a:extLst>
+            <a:ext uri="{FF2B5EF4-FFF2-40B4-BE49-F238E27FC236}">
+              <a16:creationId xmlns:a16="http://schemas.microsoft.com/office/drawing/2014/main" id="{BCA6DBD5-AD6B-2E3F-5E84-E64E46B3A76F}"/>
+            </a:ext>
+          </a:extLst>
+        </p:cNvPr>
         <p:cNvGrpSpPr/>
         <p:nvPr/>
       </p:nvGrpSpPr>
@@ -2968,10 +2979,10 @@
       </p:grpSpPr>
       <p:sp>
         <p:nvSpPr>
-          <p:cNvPr id="4" name="Rectangle 3">
-            <a:extLst>
-              <a:ext uri="{FF2B5EF4-FFF2-40B4-BE49-F238E27FC236}">
-                <a16:creationId xmlns:a16="http://schemas.microsoft.com/office/drawing/2014/main" id="{E88A4CEC-333A-F15A-BB77-265873F9565E}"/>
+          <p:cNvPr id="41" name="Isosceles Triangle 40">
+            <a:extLst>
+              <a:ext uri="{FF2B5EF4-FFF2-40B4-BE49-F238E27FC236}">
+                <a16:creationId xmlns:a16="http://schemas.microsoft.com/office/drawing/2014/main" id="{395B49D7-C6F2-D230-2737-52979AB2F5AF}"/>
               </a:ext>
             </a:extLst>
           </p:cNvPr>
@@ -2979,13 +2990,21 @@
           <p:nvPr/>
         </p:nvSpPr>
         <p:spPr>
-          <a:xfrm>
-            <a:off x="580082" y="5622758"/>
-            <a:ext cx="1681534" cy="528106"/>
-          </a:xfrm>
-          <a:prstGeom prst="rect">
-            <a:avLst/>
-          </a:prstGeom>
+          <a:xfrm rot="10800000">
+            <a:off x="718232" y="2445736"/>
+            <a:ext cx="137160" cy="91440"/>
+          </a:xfrm>
+          <a:prstGeom prst="triangle">
+            <a:avLst/>
+          </a:prstGeom>
+          <a:solidFill>
+            <a:schemeClr val="tx1"/>
+          </a:solidFill>
+          <a:ln>
+            <a:solidFill>
+              <a:schemeClr val="tx1"/>
+            </a:solidFill>
+          </a:ln>
         </p:spPr>
         <p:style>
           <a:lnRef idx="2">
@@ -3008,19 +3027,16 @@
           <a:lstStyle/>
           <a:p>
             <a:pPr algn="ctr"/>
-            <a:r>
-              <a:rPr lang="en-GB" sz="1200" dirty="0"/>
-              <a:t>Establishment from aboveground seeds</a:t>
-            </a:r>
-          </a:p>
-        </p:txBody>
-      </p:sp>
-      <p:sp>
-        <p:nvSpPr>
-          <p:cNvPr id="5" name="Rectangle 4">
-            <a:extLst>
-              <a:ext uri="{FF2B5EF4-FFF2-40B4-BE49-F238E27FC236}">
-                <a16:creationId xmlns:a16="http://schemas.microsoft.com/office/drawing/2014/main" id="{4A787D02-0409-A8DE-1E0D-79F6E69544B4}"/>
+            <a:endParaRPr lang="en-US"/>
+          </a:p>
+        </p:txBody>
+      </p:sp>
+      <p:sp>
+        <p:nvSpPr>
+          <p:cNvPr id="44" name="Isosceles Triangle 43">
+            <a:extLst>
+              <a:ext uri="{FF2B5EF4-FFF2-40B4-BE49-F238E27FC236}">
+                <a16:creationId xmlns:a16="http://schemas.microsoft.com/office/drawing/2014/main" id="{2ED0B617-4BEA-BCD8-F013-5E3100AB1911}"/>
               </a:ext>
             </a:extLst>
           </p:cNvPr>
@@ -3028,13 +3044,21 @@
           <p:nvPr/>
         </p:nvSpPr>
         <p:spPr>
-          <a:xfrm>
-            <a:off x="580082" y="7154458"/>
-            <a:ext cx="1681534" cy="528106"/>
-          </a:xfrm>
-          <a:prstGeom prst="rect">
-            <a:avLst/>
-          </a:prstGeom>
+          <a:xfrm rot="10800000">
+            <a:off x="719026" y="3738443"/>
+            <a:ext cx="137160" cy="91440"/>
+          </a:xfrm>
+          <a:prstGeom prst="triangle">
+            <a:avLst/>
+          </a:prstGeom>
+          <a:solidFill>
+            <a:schemeClr val="tx1"/>
+          </a:solidFill>
+          <a:ln>
+            <a:solidFill>
+              <a:schemeClr val="tx1"/>
+            </a:solidFill>
+          </a:ln>
         </p:spPr>
         <p:style>
           <a:lnRef idx="2">
@@ -3057,19 +3081,16 @@
           <a:lstStyle/>
           <a:p>
             <a:pPr algn="ctr"/>
-            <a:r>
-              <a:rPr lang="en-GB" sz="1200" dirty="0"/>
-              <a:t>Rosette survival over winter</a:t>
-            </a:r>
-          </a:p>
-        </p:txBody>
-      </p:sp>
-      <p:sp>
-        <p:nvSpPr>
-          <p:cNvPr id="6" name="Rectangle 5">
-            <a:extLst>
-              <a:ext uri="{FF2B5EF4-FFF2-40B4-BE49-F238E27FC236}">
-                <a16:creationId xmlns:a16="http://schemas.microsoft.com/office/drawing/2014/main" id="{D03422A5-6CAB-8B82-10FB-24EAA724F80B}"/>
+            <a:endParaRPr lang="en-US"/>
+          </a:p>
+        </p:txBody>
+      </p:sp>
+      <p:sp>
+        <p:nvSpPr>
+          <p:cNvPr id="46" name="Isosceles Triangle 45">
+            <a:extLst>
+              <a:ext uri="{FF2B5EF4-FFF2-40B4-BE49-F238E27FC236}">
+                <a16:creationId xmlns:a16="http://schemas.microsoft.com/office/drawing/2014/main" id="{6D09F2A8-0BC4-E3F8-9B83-02D89DBE1F78}"/>
               </a:ext>
             </a:extLst>
           </p:cNvPr>
@@ -3077,13 +3098,21 @@
           <p:nvPr/>
         </p:nvSpPr>
         <p:spPr>
-          <a:xfrm>
-            <a:off x="580082" y="587462"/>
-            <a:ext cx="1681534" cy="528106"/>
-          </a:xfrm>
-          <a:prstGeom prst="rect">
-            <a:avLst/>
-          </a:prstGeom>
+          <a:xfrm rot="10800000">
+            <a:off x="718232" y="5030355"/>
+            <a:ext cx="137160" cy="91440"/>
+          </a:xfrm>
+          <a:prstGeom prst="triangle">
+            <a:avLst/>
+          </a:prstGeom>
+          <a:solidFill>
+            <a:schemeClr val="tx1"/>
+          </a:solidFill>
+          <a:ln>
+            <a:solidFill>
+              <a:schemeClr val="tx1"/>
+            </a:solidFill>
+          </a:ln>
         </p:spPr>
         <p:style>
           <a:lnRef idx="2">
@@ -3106,19 +3135,16 @@
           <a:lstStyle/>
           <a:p>
             <a:pPr algn="ctr"/>
-            <a:r>
-              <a:rPr lang="en-GB" sz="1200" dirty="0"/>
-              <a:t>Growth before bolting</a:t>
-            </a:r>
-          </a:p>
-        </p:txBody>
-      </p:sp>
-      <p:sp>
-        <p:nvSpPr>
-          <p:cNvPr id="7" name="Rectangle 6">
-            <a:extLst>
-              <a:ext uri="{FF2B5EF4-FFF2-40B4-BE49-F238E27FC236}">
-                <a16:creationId xmlns:a16="http://schemas.microsoft.com/office/drawing/2014/main" id="{11D6830B-6658-104A-CE4D-29F8EDC55346}"/>
+            <a:endParaRPr lang="en-US"/>
+          </a:p>
+        </p:txBody>
+      </p:sp>
+      <p:sp>
+        <p:nvSpPr>
+          <p:cNvPr id="49" name="Isosceles Triangle 48">
+            <a:extLst>
+              <a:ext uri="{FF2B5EF4-FFF2-40B4-BE49-F238E27FC236}">
+                <a16:creationId xmlns:a16="http://schemas.microsoft.com/office/drawing/2014/main" id="{D003B986-01E8-DA18-9B8D-084416A8F68A}"/>
               </a:ext>
             </a:extLst>
           </p:cNvPr>
@@ -3127,12 +3153,20 @@
         </p:nvSpPr>
         <p:spPr>
           <a:xfrm>
-            <a:off x="580082" y="1306790"/>
-            <a:ext cx="1681534" cy="528106"/>
-          </a:xfrm>
-          <a:prstGeom prst="rect">
-            <a:avLst/>
-          </a:prstGeom>
+            <a:off x="4682443" y="4661213"/>
+            <a:ext cx="137160" cy="91440"/>
+          </a:xfrm>
+          <a:prstGeom prst="triangle">
+            <a:avLst/>
+          </a:prstGeom>
+          <a:solidFill>
+            <a:schemeClr val="tx1"/>
+          </a:solidFill>
+          <a:ln>
+            <a:solidFill>
+              <a:schemeClr val="tx1"/>
+            </a:solidFill>
+          </a:ln>
         </p:spPr>
         <p:style>
           <a:lnRef idx="2">
@@ -3155,19 +3189,16 @@
           <a:lstStyle/>
           <a:p>
             <a:pPr algn="ctr"/>
-            <a:r>
-              <a:rPr lang="en-GB" sz="1200" dirty="0"/>
-              <a:t>Bolting/flowering</a:t>
-            </a:r>
-          </a:p>
-        </p:txBody>
-      </p:sp>
-      <p:sp>
-        <p:nvSpPr>
-          <p:cNvPr id="8" name="Rectangle 7">
-            <a:extLst>
-              <a:ext uri="{FF2B5EF4-FFF2-40B4-BE49-F238E27FC236}">
-                <a16:creationId xmlns:a16="http://schemas.microsoft.com/office/drawing/2014/main" id="{BCC64074-9473-4A66-BE53-5A5F3CB2285B}"/>
+            <a:endParaRPr lang="en-US"/>
+          </a:p>
+        </p:txBody>
+      </p:sp>
+      <p:sp>
+        <p:nvSpPr>
+          <p:cNvPr id="52" name="Isosceles Triangle 51">
+            <a:extLst>
+              <a:ext uri="{FF2B5EF4-FFF2-40B4-BE49-F238E27FC236}">
+                <a16:creationId xmlns:a16="http://schemas.microsoft.com/office/drawing/2014/main" id="{C265653B-AF11-2070-9CFE-B34ECFC771F4}"/>
               </a:ext>
             </a:extLst>
           </p:cNvPr>
@@ -3176,12 +3207,20 @@
         </p:nvSpPr>
         <p:spPr>
           <a:xfrm>
-            <a:off x="2500322" y="7154458"/>
-            <a:ext cx="1681534" cy="528106"/>
-          </a:xfrm>
-          <a:prstGeom prst="rect">
-            <a:avLst/>
-          </a:prstGeom>
+            <a:off x="4679267" y="3366487"/>
+            <a:ext cx="137160" cy="91440"/>
+          </a:xfrm>
+          <a:prstGeom prst="triangle">
+            <a:avLst/>
+          </a:prstGeom>
+          <a:solidFill>
+            <a:schemeClr val="tx1"/>
+          </a:solidFill>
+          <a:ln>
+            <a:solidFill>
+              <a:schemeClr val="tx1"/>
+            </a:solidFill>
+          </a:ln>
         </p:spPr>
         <p:style>
           <a:lnRef idx="2">
@@ -3204,19 +3243,16 @@
           <a:lstStyle/>
           <a:p>
             <a:pPr algn="ctr"/>
-            <a:r>
-              <a:rPr lang="en-GB" sz="1200" dirty="0"/>
-              <a:t>Seed bank survival over winter</a:t>
-            </a:r>
-          </a:p>
-        </p:txBody>
-      </p:sp>
-      <p:sp>
-        <p:nvSpPr>
-          <p:cNvPr id="9" name="Rectangle 8">
-            <a:extLst>
-              <a:ext uri="{FF2B5EF4-FFF2-40B4-BE49-F238E27FC236}">
-                <a16:creationId xmlns:a16="http://schemas.microsoft.com/office/drawing/2014/main" id="{238779C5-3C21-1C33-3B96-091C54CE843B}"/>
+            <a:endParaRPr lang="en-US"/>
+          </a:p>
+        </p:txBody>
+      </p:sp>
+      <p:sp>
+        <p:nvSpPr>
+          <p:cNvPr id="58" name="Isosceles Triangle 57">
+            <a:extLst>
+              <a:ext uri="{FF2B5EF4-FFF2-40B4-BE49-F238E27FC236}">
+                <a16:creationId xmlns:a16="http://schemas.microsoft.com/office/drawing/2014/main" id="{49861535-9CAA-C0ED-EA91-BD29A1F45359}"/>
               </a:ext>
             </a:extLst>
           </p:cNvPr>
@@ -3224,13 +3260,21 @@
           <p:nvPr/>
         </p:nvSpPr>
         <p:spPr>
-          <a:xfrm>
-            <a:off x="2500322" y="6388608"/>
-            <a:ext cx="1681534" cy="528106"/>
-          </a:xfrm>
-          <a:prstGeom prst="rect">
-            <a:avLst/>
-          </a:prstGeom>
+          <a:xfrm rot="5400000">
+            <a:off x="1576387" y="5489936"/>
+            <a:ext cx="137160" cy="91440"/>
+          </a:xfrm>
+          <a:prstGeom prst="triangle">
+            <a:avLst/>
+          </a:prstGeom>
+          <a:solidFill>
+            <a:schemeClr val="tx1"/>
+          </a:solidFill>
+          <a:ln>
+            <a:solidFill>
+              <a:schemeClr val="tx1"/>
+            </a:solidFill>
+          </a:ln>
         </p:spPr>
         <p:style>
           <a:lnRef idx="2">
@@ -3253,19 +3297,16 @@
           <a:lstStyle/>
           <a:p>
             <a:pPr algn="ctr"/>
-            <a:r>
-              <a:rPr lang="en-GB" sz="1200" dirty="0"/>
-              <a:t>Establishment from seed bank</a:t>
-            </a:r>
-          </a:p>
-        </p:txBody>
-      </p:sp>
-      <p:sp>
-        <p:nvSpPr>
-          <p:cNvPr id="10" name="Rectangle 9">
-            <a:extLst>
-              <a:ext uri="{FF2B5EF4-FFF2-40B4-BE49-F238E27FC236}">
-                <a16:creationId xmlns:a16="http://schemas.microsoft.com/office/drawing/2014/main" id="{FA3F3FF7-718A-2FD1-6B6E-D85EF1480E0F}"/>
+            <a:endParaRPr lang="en-US"/>
+          </a:p>
+        </p:txBody>
+      </p:sp>
+      <p:sp>
+        <p:nvSpPr>
+          <p:cNvPr id="62" name="Isosceles Triangle 61">
+            <a:extLst>
+              <a:ext uri="{FF2B5EF4-FFF2-40B4-BE49-F238E27FC236}">
+                <a16:creationId xmlns:a16="http://schemas.microsoft.com/office/drawing/2014/main" id="{898DF335-0F1C-3E2B-5987-E11D4F3A5418}"/>
               </a:ext>
             </a:extLst>
           </p:cNvPr>
@@ -3273,13 +3314,21 @@
           <p:nvPr/>
         </p:nvSpPr>
         <p:spPr>
-          <a:xfrm>
-            <a:off x="580082" y="2026118"/>
-            <a:ext cx="1681534" cy="528106"/>
-          </a:xfrm>
-          <a:prstGeom prst="rect">
-            <a:avLst/>
-          </a:prstGeom>
+          <a:xfrm rot="5400000">
+            <a:off x="2896505" y="5489936"/>
+            <a:ext cx="137160" cy="91440"/>
+          </a:xfrm>
+          <a:prstGeom prst="triangle">
+            <a:avLst/>
+          </a:prstGeom>
+          <a:solidFill>
+            <a:schemeClr val="tx1"/>
+          </a:solidFill>
+          <a:ln>
+            <a:solidFill>
+              <a:schemeClr val="tx1"/>
+            </a:solidFill>
+          </a:ln>
         </p:spPr>
         <p:style>
           <a:lnRef idx="2">
@@ -3302,19 +3351,16 @@
           <a:lstStyle/>
           <a:p>
             <a:pPr algn="ctr"/>
-            <a:r>
-              <a:rPr lang="en-GB" sz="1200" dirty="0"/>
-              <a:t>Number of flower heads</a:t>
-            </a:r>
-          </a:p>
-        </p:txBody>
-      </p:sp>
-      <p:sp>
-        <p:nvSpPr>
-          <p:cNvPr id="11" name="Rectangle 10">
-            <a:extLst>
-              <a:ext uri="{FF2B5EF4-FFF2-40B4-BE49-F238E27FC236}">
-                <a16:creationId xmlns:a16="http://schemas.microsoft.com/office/drawing/2014/main" id="{CDAF43C2-C452-BD2A-4E1E-6EE02D0629C7}"/>
+            <a:endParaRPr lang="en-US"/>
+          </a:p>
+        </p:txBody>
+      </p:sp>
+      <p:sp>
+        <p:nvSpPr>
+          <p:cNvPr id="64" name="Isosceles Triangle 63">
+            <a:extLst>
+              <a:ext uri="{FF2B5EF4-FFF2-40B4-BE49-F238E27FC236}">
+                <a16:creationId xmlns:a16="http://schemas.microsoft.com/office/drawing/2014/main" id="{7D7B0302-C56A-A17C-33EB-CF6A221BAFF0}"/>
               </a:ext>
             </a:extLst>
           </p:cNvPr>
@@ -3322,13 +3368,21 @@
           <p:nvPr/>
         </p:nvSpPr>
         <p:spPr>
-          <a:xfrm>
-            <a:off x="580082" y="3464774"/>
-            <a:ext cx="1681534" cy="528106"/>
-          </a:xfrm>
-          <a:prstGeom prst="rect">
-            <a:avLst/>
-          </a:prstGeom>
+          <a:xfrm rot="5400000">
+            <a:off x="4216623" y="5489936"/>
+            <a:ext cx="137160" cy="91440"/>
+          </a:xfrm>
+          <a:prstGeom prst="triangle">
+            <a:avLst/>
+          </a:prstGeom>
+          <a:solidFill>
+            <a:schemeClr val="tx1"/>
+          </a:solidFill>
+          <a:ln>
+            <a:solidFill>
+              <a:schemeClr val="tx1"/>
+            </a:solidFill>
+          </a:ln>
         </p:spPr>
         <p:style>
           <a:lnRef idx="2">
@@ -3351,19 +3405,16 @@
           <a:lstStyle/>
           <a:p>
             <a:pPr algn="ctr"/>
-            <a:r>
-              <a:rPr lang="en-GB" sz="1200" dirty="0"/>
-              <a:t>Number of seeds</a:t>
-            </a:r>
-          </a:p>
-        </p:txBody>
-      </p:sp>
-      <p:sp>
-        <p:nvSpPr>
-          <p:cNvPr id="12" name="Rectangle 11">
-            <a:extLst>
-              <a:ext uri="{FF2B5EF4-FFF2-40B4-BE49-F238E27FC236}">
-                <a16:creationId xmlns:a16="http://schemas.microsoft.com/office/drawing/2014/main" id="{8B14998C-5C6A-A849-5A36-11FB7926E8A4}"/>
+            <a:endParaRPr lang="en-US"/>
+          </a:p>
+        </p:txBody>
+      </p:sp>
+      <p:sp>
+        <p:nvSpPr>
+          <p:cNvPr id="66" name="Isosceles Triangle 65">
+            <a:extLst>
+              <a:ext uri="{FF2B5EF4-FFF2-40B4-BE49-F238E27FC236}">
+                <a16:creationId xmlns:a16="http://schemas.microsoft.com/office/drawing/2014/main" id="{A0158633-4ED8-35BB-B840-AE0607B88D73}"/>
               </a:ext>
             </a:extLst>
           </p:cNvPr>
@@ -3371,13 +3422,21 @@
           <p:nvPr/>
         </p:nvSpPr>
         <p:spPr>
-          <a:xfrm>
-            <a:off x="580082" y="4184102"/>
-            <a:ext cx="1681534" cy="528106"/>
-          </a:xfrm>
-          <a:prstGeom prst="rect">
-            <a:avLst/>
-          </a:prstGeom>
+          <a:xfrm rot="16200000">
+            <a:off x="3818843" y="1621668"/>
+            <a:ext cx="137160" cy="91440"/>
+          </a:xfrm>
+          <a:prstGeom prst="triangle">
+            <a:avLst/>
+          </a:prstGeom>
+          <a:solidFill>
+            <a:schemeClr val="tx1"/>
+          </a:solidFill>
+          <a:ln>
+            <a:solidFill>
+              <a:schemeClr val="tx1"/>
+            </a:solidFill>
+          </a:ln>
         </p:spPr>
         <p:style>
           <a:lnRef idx="2">
@@ -3400,19 +3459,16 @@
           <a:lstStyle/>
           <a:p>
             <a:pPr algn="ctr"/>
-            <a:r>
-              <a:rPr lang="en-GB" sz="1200" dirty="0"/>
-              <a:t>Wind dispersal</a:t>
-            </a:r>
-          </a:p>
-        </p:txBody>
-      </p:sp>
-      <p:sp>
-        <p:nvSpPr>
-          <p:cNvPr id="13" name="Rectangle 12">
-            <a:extLst>
-              <a:ext uri="{FF2B5EF4-FFF2-40B4-BE49-F238E27FC236}">
-                <a16:creationId xmlns:a16="http://schemas.microsoft.com/office/drawing/2014/main" id="{9E0B5F6B-2909-3C54-FCED-3B8D548466F2}"/>
+            <a:endParaRPr lang="en-US"/>
+          </a:p>
+        </p:txBody>
+      </p:sp>
+      <p:sp>
+        <p:nvSpPr>
+          <p:cNvPr id="69" name="Isosceles Triangle 68">
+            <a:extLst>
+              <a:ext uri="{FF2B5EF4-FFF2-40B4-BE49-F238E27FC236}">
+                <a16:creationId xmlns:a16="http://schemas.microsoft.com/office/drawing/2014/main" id="{FF703343-67D3-047A-B212-3471E846D4E6}"/>
               </a:ext>
             </a:extLst>
           </p:cNvPr>
@@ -3420,13 +3476,21 @@
           <p:nvPr/>
         </p:nvSpPr>
         <p:spPr>
-          <a:xfrm>
-            <a:off x="580082" y="4903430"/>
-            <a:ext cx="1681534" cy="528106"/>
-          </a:xfrm>
-          <a:prstGeom prst="rect">
-            <a:avLst/>
-          </a:prstGeom>
+          <a:xfrm rot="16200000">
+            <a:off x="2498725" y="1621668"/>
+            <a:ext cx="137160" cy="91440"/>
+          </a:xfrm>
+          <a:prstGeom prst="triangle">
+            <a:avLst/>
+          </a:prstGeom>
+          <a:solidFill>
+            <a:schemeClr val="tx1"/>
+          </a:solidFill>
+          <a:ln>
+            <a:solidFill>
+              <a:schemeClr val="tx1"/>
+            </a:solidFill>
+          </a:ln>
         </p:spPr>
         <p:style>
           <a:lnRef idx="2">
@@ -3449,19 +3513,16 @@
           <a:lstStyle/>
           <a:p>
             <a:pPr algn="ctr"/>
-            <a:r>
-              <a:rPr lang="en-GB" sz="1200" dirty="0"/>
-              <a:t>Ant dispersal</a:t>
-            </a:r>
-          </a:p>
-        </p:txBody>
-      </p:sp>
-      <p:sp>
-        <p:nvSpPr>
-          <p:cNvPr id="15" name="Rectangle 14">
-            <a:extLst>
-              <a:ext uri="{FF2B5EF4-FFF2-40B4-BE49-F238E27FC236}">
-                <a16:creationId xmlns:a16="http://schemas.microsoft.com/office/drawing/2014/main" id="{068E4A37-DD73-D13C-E9FE-4EB1B95D8A30}"/>
+            <a:endParaRPr lang="en-US"/>
+          </a:p>
+        </p:txBody>
+      </p:sp>
+      <p:sp>
+        <p:nvSpPr>
+          <p:cNvPr id="71" name="Isosceles Triangle 70">
+            <a:extLst>
+              <a:ext uri="{FF2B5EF4-FFF2-40B4-BE49-F238E27FC236}">
+                <a16:creationId xmlns:a16="http://schemas.microsoft.com/office/drawing/2014/main" id="{31738310-7CD9-D628-16E4-03E3ACFB9E61}"/>
               </a:ext>
             </a:extLst>
           </p:cNvPr>
@@ -3469,13 +3530,21 @@
           <p:nvPr/>
         </p:nvSpPr>
         <p:spPr>
-          <a:xfrm>
-            <a:off x="2500322" y="5622758"/>
-            <a:ext cx="1681534" cy="528106"/>
-          </a:xfrm>
-          <a:prstGeom prst="rect">
-            <a:avLst/>
-          </a:prstGeom>
+          <a:xfrm rot="16200000">
+            <a:off x="1179400" y="1621668"/>
+            <a:ext cx="137160" cy="91440"/>
+          </a:xfrm>
+          <a:prstGeom prst="triangle">
+            <a:avLst/>
+          </a:prstGeom>
+          <a:solidFill>
+            <a:schemeClr val="tx1"/>
+          </a:solidFill>
+          <a:ln>
+            <a:solidFill>
+              <a:schemeClr val="tx1"/>
+            </a:solidFill>
+          </a:ln>
         </p:spPr>
         <p:style>
           <a:lnRef idx="2">
@@ -3498,19 +3567,16 @@
           <a:lstStyle/>
           <a:p>
             <a:pPr algn="ctr"/>
-            <a:r>
-              <a:rPr lang="en-GB" sz="1200" dirty="0"/>
-              <a:t>Entry into seed bank</a:t>
-            </a:r>
-          </a:p>
-        </p:txBody>
-      </p:sp>
-      <p:sp>
-        <p:nvSpPr>
-          <p:cNvPr id="16" name="Rectangle 15">
-            <a:extLst>
-              <a:ext uri="{FF2B5EF4-FFF2-40B4-BE49-F238E27FC236}">
-                <a16:creationId xmlns:a16="http://schemas.microsoft.com/office/drawing/2014/main" id="{42F7FF86-8744-4567-0C07-4E56EBBD2CF3}"/>
+            <a:endParaRPr lang="en-US"/>
+          </a:p>
+        </p:txBody>
+      </p:sp>
+      <p:sp>
+        <p:nvSpPr>
+          <p:cNvPr id="83" name="Isosceles Triangle 82">
+            <a:extLst>
+              <a:ext uri="{FF2B5EF4-FFF2-40B4-BE49-F238E27FC236}">
+                <a16:creationId xmlns:a16="http://schemas.microsoft.com/office/drawing/2014/main" id="{1C54AE34-07DA-F20B-C7F7-1FC54707A650}"/>
               </a:ext>
             </a:extLst>
           </p:cNvPr>
@@ -3518,13 +3584,21 @@
           <p:nvPr/>
         </p:nvSpPr>
         <p:spPr>
-          <a:xfrm>
-            <a:off x="580082" y="2745446"/>
-            <a:ext cx="1681534" cy="528106"/>
-          </a:xfrm>
-          <a:prstGeom prst="rect">
-            <a:avLst/>
-          </a:prstGeom>
+          <a:xfrm rot="10800000">
+            <a:off x="6067743" y="2440179"/>
+            <a:ext cx="137160" cy="91440"/>
+          </a:xfrm>
+          <a:prstGeom prst="triangle">
+            <a:avLst/>
+          </a:prstGeom>
+          <a:solidFill>
+            <a:schemeClr val="tx1"/>
+          </a:solidFill>
+          <a:ln>
+            <a:solidFill>
+              <a:schemeClr val="tx1"/>
+            </a:solidFill>
+          </a:ln>
         </p:spPr>
         <p:style>
           <a:lnRef idx="2">
@@ -3547,17 +3621,4194 @@
           <a:lstStyle/>
           <a:p>
             <a:pPr algn="ctr"/>
-            <a:r>
-              <a:rPr lang="en-GB" sz="1200" dirty="0"/>
-              <a:t>Flower head height</a:t>
-            </a:r>
+            <a:endParaRPr lang="en-US"/>
+          </a:p>
+        </p:txBody>
+      </p:sp>
+      <p:sp>
+        <p:nvSpPr>
+          <p:cNvPr id="85" name="Isosceles Triangle 84">
+            <a:extLst>
+              <a:ext uri="{FF2B5EF4-FFF2-40B4-BE49-F238E27FC236}">
+                <a16:creationId xmlns:a16="http://schemas.microsoft.com/office/drawing/2014/main" id="{41783B05-7395-E337-E79B-B3DD71DE163A}"/>
+              </a:ext>
+            </a:extLst>
+          </p:cNvPr>
+          <p:cNvSpPr/>
+          <p:nvPr/>
+        </p:nvSpPr>
+        <p:spPr>
+          <a:xfrm rot="10800000">
+            <a:off x="6061758" y="3736380"/>
+            <a:ext cx="137160" cy="91440"/>
+          </a:xfrm>
+          <a:prstGeom prst="triangle">
+            <a:avLst/>
+          </a:prstGeom>
+          <a:solidFill>
+            <a:schemeClr val="tx1"/>
+          </a:solidFill>
+          <a:ln>
+            <a:solidFill>
+              <a:schemeClr val="tx1"/>
+            </a:solidFill>
+          </a:ln>
+        </p:spPr>
+        <p:style>
+          <a:lnRef idx="2">
+            <a:schemeClr val="accent1">
+              <a:shade val="15000"/>
+            </a:schemeClr>
+          </a:lnRef>
+          <a:fillRef idx="1">
+            <a:schemeClr val="accent1"/>
+          </a:fillRef>
+          <a:effectRef idx="0">
+            <a:schemeClr val="accent1"/>
+          </a:effectRef>
+          <a:fontRef idx="minor">
+            <a:schemeClr val="lt1"/>
+          </a:fontRef>
+        </p:style>
+        <p:txBody>
+          <a:bodyPr rtlCol="0" anchor="ctr"/>
+          <a:lstStyle/>
+          <a:p>
+            <a:pPr algn="ctr"/>
+            <a:endParaRPr lang="en-US"/>
+          </a:p>
+        </p:txBody>
+      </p:sp>
+      <p:sp>
+        <p:nvSpPr>
+          <p:cNvPr id="96" name="Isosceles Triangle 95">
+            <a:extLst>
+              <a:ext uri="{FF2B5EF4-FFF2-40B4-BE49-F238E27FC236}">
+                <a16:creationId xmlns:a16="http://schemas.microsoft.com/office/drawing/2014/main" id="{BEE1AE59-63D7-49A5-6954-CE2CAF159A54}"/>
+              </a:ext>
+            </a:extLst>
+          </p:cNvPr>
+          <p:cNvSpPr/>
+          <p:nvPr/>
+        </p:nvSpPr>
+        <p:spPr>
+          <a:xfrm rot="16200000">
+            <a:off x="5143406" y="5489936"/>
+            <a:ext cx="137160" cy="91440"/>
+          </a:xfrm>
+          <a:prstGeom prst="triangle">
+            <a:avLst/>
+          </a:prstGeom>
+          <a:solidFill>
+            <a:schemeClr val="tx1"/>
+          </a:solidFill>
+          <a:ln>
+            <a:solidFill>
+              <a:schemeClr val="tx1"/>
+            </a:solidFill>
+          </a:ln>
+        </p:spPr>
+        <p:style>
+          <a:lnRef idx="2">
+            <a:schemeClr val="accent1">
+              <a:shade val="15000"/>
+            </a:schemeClr>
+          </a:lnRef>
+          <a:fillRef idx="1">
+            <a:schemeClr val="accent1"/>
+          </a:fillRef>
+          <a:effectRef idx="0">
+            <a:schemeClr val="accent1"/>
+          </a:effectRef>
+          <a:fontRef idx="minor">
+            <a:schemeClr val="lt1"/>
+          </a:fontRef>
+        </p:style>
+        <p:txBody>
+          <a:bodyPr rtlCol="0" anchor="ctr"/>
+          <a:lstStyle/>
+          <a:p>
+            <a:pPr algn="ctr"/>
+            <a:endParaRPr lang="en-US"/>
+          </a:p>
+        </p:txBody>
+      </p:sp>
+      <p:sp>
+        <p:nvSpPr>
+          <p:cNvPr id="106" name="Isosceles Triangle 105">
+            <a:extLst>
+              <a:ext uri="{FF2B5EF4-FFF2-40B4-BE49-F238E27FC236}">
+                <a16:creationId xmlns:a16="http://schemas.microsoft.com/office/drawing/2014/main" id="{98C308C2-59B5-3E9F-DD2E-823534C28E62}"/>
+              </a:ext>
+            </a:extLst>
+          </p:cNvPr>
+          <p:cNvSpPr/>
+          <p:nvPr/>
+        </p:nvSpPr>
+        <p:spPr>
+          <a:xfrm rot="16200000">
+            <a:off x="5137828" y="3078508"/>
+            <a:ext cx="137160" cy="91440"/>
+          </a:xfrm>
+          <a:prstGeom prst="triangle">
+            <a:avLst/>
+          </a:prstGeom>
+          <a:solidFill>
+            <a:schemeClr val="tx1"/>
+          </a:solidFill>
+          <a:ln>
+            <a:solidFill>
+              <a:schemeClr val="tx1"/>
+            </a:solidFill>
+          </a:ln>
+        </p:spPr>
+        <p:style>
+          <a:lnRef idx="2">
+            <a:schemeClr val="accent1">
+              <a:shade val="15000"/>
+            </a:schemeClr>
+          </a:lnRef>
+          <a:fillRef idx="1">
+            <a:schemeClr val="accent1"/>
+          </a:fillRef>
+          <a:effectRef idx="0">
+            <a:schemeClr val="accent1"/>
+          </a:effectRef>
+          <a:fontRef idx="minor">
+            <a:schemeClr val="lt1"/>
+          </a:fontRef>
+        </p:style>
+        <p:txBody>
+          <a:bodyPr rtlCol="0" anchor="ctr"/>
+          <a:lstStyle/>
+          <a:p>
+            <a:pPr algn="ctr"/>
+            <a:endParaRPr lang="en-US"/>
+          </a:p>
+        </p:txBody>
+      </p:sp>
+      <p:sp>
+        <p:nvSpPr>
+          <p:cNvPr id="107" name="Isosceles Triangle 106">
+            <a:extLst>
+              <a:ext uri="{FF2B5EF4-FFF2-40B4-BE49-F238E27FC236}">
+                <a16:creationId xmlns:a16="http://schemas.microsoft.com/office/drawing/2014/main" id="{4D2186BF-AA12-5651-2456-547AE8C27A08}"/>
+              </a:ext>
+            </a:extLst>
+          </p:cNvPr>
+          <p:cNvSpPr/>
+          <p:nvPr/>
+        </p:nvSpPr>
+        <p:spPr>
+          <a:xfrm rot="16200000">
+            <a:off x="5138649" y="2728264"/>
+            <a:ext cx="137160" cy="91440"/>
+          </a:xfrm>
+          <a:prstGeom prst="triangle">
+            <a:avLst/>
+          </a:prstGeom>
+          <a:solidFill>
+            <a:schemeClr val="tx1"/>
+          </a:solidFill>
+          <a:ln>
+            <a:solidFill>
+              <a:schemeClr val="tx1"/>
+            </a:solidFill>
+          </a:ln>
+        </p:spPr>
+        <p:style>
+          <a:lnRef idx="2">
+            <a:schemeClr val="accent1">
+              <a:shade val="15000"/>
+            </a:schemeClr>
+          </a:lnRef>
+          <a:fillRef idx="1">
+            <a:schemeClr val="accent1"/>
+          </a:fillRef>
+          <a:effectRef idx="0">
+            <a:schemeClr val="accent1"/>
+          </a:effectRef>
+          <a:fontRef idx="minor">
+            <a:schemeClr val="lt1"/>
+          </a:fontRef>
+        </p:style>
+        <p:txBody>
+          <a:bodyPr rtlCol="0" anchor="ctr"/>
+          <a:lstStyle/>
+          <a:p>
+            <a:pPr algn="ctr"/>
+            <a:endParaRPr lang="en-US"/>
+          </a:p>
+        </p:txBody>
+      </p:sp>
+      <p:sp>
+        <p:nvSpPr>
+          <p:cNvPr id="120" name="Isosceles Triangle 119">
+            <a:extLst>
+              <a:ext uri="{FF2B5EF4-FFF2-40B4-BE49-F238E27FC236}">
+                <a16:creationId xmlns:a16="http://schemas.microsoft.com/office/drawing/2014/main" id="{06A4C4BE-7CEF-0706-7A5A-0AA0341006C9}"/>
+              </a:ext>
+            </a:extLst>
+          </p:cNvPr>
+          <p:cNvSpPr/>
+          <p:nvPr/>
+        </p:nvSpPr>
+        <p:spPr>
+          <a:xfrm>
+            <a:off x="6269038" y="4664388"/>
+            <a:ext cx="137160" cy="91440"/>
+          </a:xfrm>
+          <a:prstGeom prst="triangle">
+            <a:avLst/>
+          </a:prstGeom>
+          <a:solidFill>
+            <a:schemeClr val="tx1"/>
+          </a:solidFill>
+          <a:ln>
+            <a:solidFill>
+              <a:schemeClr val="tx1"/>
+            </a:solidFill>
+          </a:ln>
+        </p:spPr>
+        <p:style>
+          <a:lnRef idx="2">
+            <a:schemeClr val="accent1">
+              <a:shade val="15000"/>
+            </a:schemeClr>
+          </a:lnRef>
+          <a:fillRef idx="1">
+            <a:schemeClr val="accent1"/>
+          </a:fillRef>
+          <a:effectRef idx="0">
+            <a:schemeClr val="accent1"/>
+          </a:effectRef>
+          <a:fontRef idx="minor">
+            <a:schemeClr val="lt1"/>
+          </a:fontRef>
+        </p:style>
+        <p:txBody>
+          <a:bodyPr rtlCol="0" anchor="ctr"/>
+          <a:lstStyle/>
+          <a:p>
+            <a:pPr algn="ctr"/>
+            <a:endParaRPr lang="en-US"/>
+          </a:p>
+        </p:txBody>
+      </p:sp>
+      <p:sp>
+        <p:nvSpPr>
+          <p:cNvPr id="125" name="Isosceles Triangle 124">
+            <a:extLst>
+              <a:ext uri="{FF2B5EF4-FFF2-40B4-BE49-F238E27FC236}">
+                <a16:creationId xmlns:a16="http://schemas.microsoft.com/office/drawing/2014/main" id="{18945595-ED4F-6B58-A5EE-ECA9E4E99CE9}"/>
+              </a:ext>
+            </a:extLst>
+          </p:cNvPr>
+          <p:cNvSpPr/>
+          <p:nvPr/>
+        </p:nvSpPr>
+        <p:spPr>
+          <a:xfrm rot="16200000">
+            <a:off x="5139528" y="1625663"/>
+            <a:ext cx="137160" cy="91440"/>
+          </a:xfrm>
+          <a:prstGeom prst="triangle">
+            <a:avLst/>
+          </a:prstGeom>
+          <a:solidFill>
+            <a:schemeClr val="tx1"/>
+          </a:solidFill>
+          <a:ln>
+            <a:solidFill>
+              <a:schemeClr val="tx1"/>
+            </a:solidFill>
+          </a:ln>
+        </p:spPr>
+        <p:style>
+          <a:lnRef idx="2">
+            <a:schemeClr val="accent1">
+              <a:shade val="15000"/>
+            </a:schemeClr>
+          </a:lnRef>
+          <a:fillRef idx="1">
+            <a:schemeClr val="accent1"/>
+          </a:fillRef>
+          <a:effectRef idx="0">
+            <a:schemeClr val="accent1"/>
+          </a:effectRef>
+          <a:fontRef idx="minor">
+            <a:schemeClr val="lt1"/>
+          </a:fontRef>
+        </p:style>
+        <p:txBody>
+          <a:bodyPr rtlCol="0" anchor="ctr"/>
+          <a:lstStyle/>
+          <a:p>
+            <a:pPr algn="ctr"/>
+            <a:endParaRPr lang="en-US"/>
+          </a:p>
+        </p:txBody>
+      </p:sp>
+      <p:sp>
+        <p:nvSpPr>
+          <p:cNvPr id="127" name="Isosceles Triangle 126">
+            <a:extLst>
+              <a:ext uri="{FF2B5EF4-FFF2-40B4-BE49-F238E27FC236}">
+                <a16:creationId xmlns:a16="http://schemas.microsoft.com/office/drawing/2014/main" id="{5D56E6EF-9339-696B-3222-CCAF05A5B6D8}"/>
+              </a:ext>
+            </a:extLst>
+          </p:cNvPr>
+          <p:cNvSpPr/>
+          <p:nvPr/>
+        </p:nvSpPr>
+        <p:spPr>
+          <a:xfrm rot="5400000">
+            <a:off x="5597645" y="1443156"/>
+            <a:ext cx="137160" cy="91440"/>
+          </a:xfrm>
+          <a:prstGeom prst="triangle">
+            <a:avLst/>
+          </a:prstGeom>
+          <a:solidFill>
+            <a:schemeClr val="tx1"/>
+          </a:solidFill>
+          <a:ln>
+            <a:solidFill>
+              <a:schemeClr val="tx1"/>
+            </a:solidFill>
+          </a:ln>
+        </p:spPr>
+        <p:style>
+          <a:lnRef idx="2">
+            <a:schemeClr val="accent1">
+              <a:shade val="15000"/>
+            </a:schemeClr>
+          </a:lnRef>
+          <a:fillRef idx="1">
+            <a:schemeClr val="accent1"/>
+          </a:fillRef>
+          <a:effectRef idx="0">
+            <a:schemeClr val="accent1"/>
+          </a:effectRef>
+          <a:fontRef idx="minor">
+            <a:schemeClr val="lt1"/>
+          </a:fontRef>
+        </p:style>
+        <p:txBody>
+          <a:bodyPr rtlCol="0" anchor="ctr"/>
+          <a:lstStyle/>
+          <a:p>
+            <a:pPr algn="ctr"/>
+            <a:endParaRPr lang="en-US"/>
+          </a:p>
+        </p:txBody>
+      </p:sp>
+      <p:sp>
+        <p:nvSpPr>
+          <p:cNvPr id="132" name="Isosceles Triangle 131">
+            <a:extLst>
+              <a:ext uri="{FF2B5EF4-FFF2-40B4-BE49-F238E27FC236}">
+                <a16:creationId xmlns:a16="http://schemas.microsoft.com/office/drawing/2014/main" id="{6B092B0C-10FC-1DCF-4E51-798FA8640FC6}"/>
+              </a:ext>
+            </a:extLst>
+          </p:cNvPr>
+          <p:cNvSpPr/>
+          <p:nvPr/>
+        </p:nvSpPr>
+        <p:spPr>
+          <a:xfrm rot="5400000">
+            <a:off x="4216623" y="4200405"/>
+            <a:ext cx="137160" cy="91440"/>
+          </a:xfrm>
+          <a:prstGeom prst="triangle">
+            <a:avLst/>
+          </a:prstGeom>
+          <a:solidFill>
+            <a:schemeClr val="tx1"/>
+          </a:solidFill>
+          <a:ln>
+            <a:solidFill>
+              <a:schemeClr val="tx1"/>
+            </a:solidFill>
+          </a:ln>
+        </p:spPr>
+        <p:style>
+          <a:lnRef idx="2">
+            <a:schemeClr val="accent1">
+              <a:shade val="15000"/>
+            </a:schemeClr>
+          </a:lnRef>
+          <a:fillRef idx="1">
+            <a:schemeClr val="accent1"/>
+          </a:fillRef>
+          <a:effectRef idx="0">
+            <a:schemeClr val="accent1"/>
+          </a:effectRef>
+          <a:fontRef idx="minor">
+            <a:schemeClr val="lt1"/>
+          </a:fontRef>
+        </p:style>
+        <p:txBody>
+          <a:bodyPr rtlCol="0" anchor="ctr"/>
+          <a:lstStyle/>
+          <a:p>
+            <a:pPr algn="ctr"/>
+            <a:endParaRPr lang="en-US"/>
+          </a:p>
+        </p:txBody>
+      </p:sp>
+      <p:cxnSp>
+        <p:nvCxnSpPr>
+          <p:cNvPr id="143" name="Straight Connector 142">
+            <a:extLst>
+              <a:ext uri="{FF2B5EF4-FFF2-40B4-BE49-F238E27FC236}">
+                <a16:creationId xmlns:a16="http://schemas.microsoft.com/office/drawing/2014/main" id="{10C6BE98-72BE-B2DC-4EA1-BB30608E13FF}"/>
+              </a:ext>
+            </a:extLst>
+          </p:cNvPr>
+          <p:cNvCxnSpPr>
+            <a:cxnSpLocks/>
+          </p:cNvCxnSpPr>
+          <p:nvPr/>
+        </p:nvCxnSpPr>
+        <p:spPr>
+          <a:xfrm>
+            <a:off x="3321588" y="3133602"/>
+            <a:ext cx="960120" cy="0"/>
+          </a:xfrm>
+          <a:prstGeom prst="line">
+            <a:avLst/>
+          </a:prstGeom>
+          <a:ln w="19050">
+            <a:solidFill>
+              <a:schemeClr val="tx1"/>
+            </a:solidFill>
+          </a:ln>
+        </p:spPr>
+        <p:style>
+          <a:lnRef idx="1">
+            <a:schemeClr val="accent1"/>
+          </a:lnRef>
+          <a:fillRef idx="0">
+            <a:schemeClr val="accent1"/>
+          </a:fillRef>
+          <a:effectRef idx="0">
+            <a:schemeClr val="accent1"/>
+          </a:effectRef>
+          <a:fontRef idx="minor">
+            <a:schemeClr val="tx1"/>
+          </a:fontRef>
+        </p:style>
+      </p:cxnSp>
+      <p:sp>
+        <p:nvSpPr>
+          <p:cNvPr id="153" name="Isosceles Triangle 152">
+            <a:extLst>
+              <a:ext uri="{FF2B5EF4-FFF2-40B4-BE49-F238E27FC236}">
+                <a16:creationId xmlns:a16="http://schemas.microsoft.com/office/drawing/2014/main" id="{0992A409-C09B-A0E9-967A-91D5FA26347F}"/>
+              </a:ext>
+            </a:extLst>
+          </p:cNvPr>
+          <p:cNvSpPr/>
+          <p:nvPr/>
+        </p:nvSpPr>
+        <p:spPr>
+          <a:xfrm rot="5400000">
+            <a:off x="4216171" y="2730714"/>
+            <a:ext cx="137160" cy="91440"/>
+          </a:xfrm>
+          <a:prstGeom prst="triangle">
+            <a:avLst/>
+          </a:prstGeom>
+          <a:solidFill>
+            <a:schemeClr val="tx1"/>
+          </a:solidFill>
+          <a:ln>
+            <a:solidFill>
+              <a:schemeClr val="tx1"/>
+            </a:solidFill>
+          </a:ln>
+        </p:spPr>
+        <p:style>
+          <a:lnRef idx="2">
+            <a:schemeClr val="accent1">
+              <a:shade val="15000"/>
+            </a:schemeClr>
+          </a:lnRef>
+          <a:fillRef idx="1">
+            <a:schemeClr val="accent1"/>
+          </a:fillRef>
+          <a:effectRef idx="0">
+            <a:schemeClr val="accent1"/>
+          </a:effectRef>
+          <a:fontRef idx="minor">
+            <a:schemeClr val="lt1"/>
+          </a:fontRef>
+        </p:style>
+        <p:txBody>
+          <a:bodyPr rtlCol="0" anchor="ctr"/>
+          <a:lstStyle/>
+          <a:p>
+            <a:pPr algn="ctr"/>
+            <a:endParaRPr lang="en-US"/>
+          </a:p>
+        </p:txBody>
+      </p:sp>
+      <p:sp>
+        <p:nvSpPr>
+          <p:cNvPr id="17" name="Rectangle 16">
+            <a:extLst>
+              <a:ext uri="{FF2B5EF4-FFF2-40B4-BE49-F238E27FC236}">
+                <a16:creationId xmlns:a16="http://schemas.microsoft.com/office/drawing/2014/main" id="{C10A2048-C98B-F47E-343F-0CE2BAB5BAE8}"/>
+              </a:ext>
+            </a:extLst>
+          </p:cNvPr>
+          <p:cNvSpPr/>
+          <p:nvPr/>
+        </p:nvSpPr>
+        <p:spPr>
+          <a:xfrm>
+            <a:off x="4335686" y="1248440"/>
+            <a:ext cx="822960" cy="822960"/>
+          </a:xfrm>
+          <a:prstGeom prst="rect">
+            <a:avLst/>
+          </a:prstGeom>
+          <a:solidFill>
+            <a:schemeClr val="bg1"/>
+          </a:solidFill>
+          <a:ln w="19050">
+            <a:solidFill>
+              <a:schemeClr val="tx1"/>
+            </a:solidFill>
+          </a:ln>
+        </p:spPr>
+        <p:style>
+          <a:lnRef idx="2">
+            <a:schemeClr val="accent1">
+              <a:shade val="15000"/>
+            </a:schemeClr>
+          </a:lnRef>
+          <a:fillRef idx="1">
+            <a:schemeClr val="accent1"/>
+          </a:fillRef>
+          <a:effectRef idx="0">
+            <a:schemeClr val="accent1"/>
+          </a:effectRef>
+          <a:fontRef idx="minor">
+            <a:schemeClr val="lt1"/>
+          </a:fontRef>
+        </p:style>
+        <p:txBody>
+          <a:bodyPr wrap="none" rtlCol="0" anchor="ctr"/>
+          <a:lstStyle/>
+          <a:p>
+            <a:pPr algn="ctr"/>
+            <a:r>
+              <a:rPr lang="en-GB" sz="1300" dirty="0">
+                <a:solidFill>
+                  <a:sysClr val="windowText" lastClr="000000"/>
+                </a:solidFill>
+              </a:rPr>
+              <a:t>Growth</a:t>
+            </a:r>
+          </a:p>
+          <a:p>
+            <a:pPr algn="ctr"/>
+            <a:r>
+              <a:rPr lang="en-GB" sz="1300" dirty="0">
+                <a:solidFill>
+                  <a:sysClr val="windowText" lastClr="000000"/>
+                </a:solidFill>
+              </a:rPr>
+              <a:t>Before</a:t>
+            </a:r>
+          </a:p>
+          <a:p>
+            <a:pPr algn="ctr"/>
+            <a:r>
+              <a:rPr lang="en-GB" sz="1300" dirty="0">
+                <a:solidFill>
+                  <a:sysClr val="windowText" lastClr="000000"/>
+                </a:solidFill>
+              </a:rPr>
+              <a:t>bolting</a:t>
+            </a:r>
+          </a:p>
+        </p:txBody>
+      </p:sp>
+      <p:sp>
+        <p:nvSpPr>
+          <p:cNvPr id="20" name="Rectangle 19">
+            <a:extLst>
+              <a:ext uri="{FF2B5EF4-FFF2-40B4-BE49-F238E27FC236}">
+                <a16:creationId xmlns:a16="http://schemas.microsoft.com/office/drawing/2014/main" id="{31E17015-707B-90D3-871B-4D89F86F0410}"/>
+              </a:ext>
+            </a:extLst>
+          </p:cNvPr>
+          <p:cNvSpPr/>
+          <p:nvPr/>
+        </p:nvSpPr>
+        <p:spPr>
+          <a:xfrm>
+            <a:off x="3015568" y="1248440"/>
+            <a:ext cx="822960" cy="822960"/>
+          </a:xfrm>
+          <a:prstGeom prst="rect">
+            <a:avLst/>
+          </a:prstGeom>
+          <a:solidFill>
+            <a:schemeClr val="bg1"/>
+          </a:solidFill>
+          <a:ln w="19050">
+            <a:solidFill>
+              <a:schemeClr val="tx1"/>
+            </a:solidFill>
+          </a:ln>
+        </p:spPr>
+        <p:style>
+          <a:lnRef idx="2">
+            <a:schemeClr val="accent1">
+              <a:shade val="15000"/>
+            </a:schemeClr>
+          </a:lnRef>
+          <a:fillRef idx="1">
+            <a:schemeClr val="accent1"/>
+          </a:fillRef>
+          <a:effectRef idx="0">
+            <a:schemeClr val="accent1"/>
+          </a:effectRef>
+          <a:fontRef idx="minor">
+            <a:schemeClr val="lt1"/>
+          </a:fontRef>
+        </p:style>
+        <p:txBody>
+          <a:bodyPr wrap="none" rtlCol="0" anchor="ctr"/>
+          <a:lstStyle/>
+          <a:p>
+            <a:pPr algn="ctr"/>
+            <a:r>
+              <a:rPr lang="en-GB" sz="1300" dirty="0">
+                <a:solidFill>
+                  <a:sysClr val="windowText" lastClr="000000"/>
+                </a:solidFill>
+              </a:rPr>
+              <a:t>Rosette</a:t>
+            </a:r>
+          </a:p>
+          <a:p>
+            <a:pPr algn="ctr"/>
+            <a:r>
+              <a:rPr lang="en-GB" sz="1300" dirty="0">
+                <a:solidFill>
+                  <a:sysClr val="windowText" lastClr="000000"/>
+                </a:solidFill>
+              </a:rPr>
+              <a:t>bolting,</a:t>
+            </a:r>
+          </a:p>
+          <a:p>
+            <a:pPr algn="ctr"/>
+            <a:r>
+              <a:rPr lang="en-GB" sz="1300" dirty="0">
+                <a:solidFill>
+                  <a:sysClr val="windowText" lastClr="000000"/>
+                </a:solidFill>
+              </a:rPr>
+              <a:t>flowering</a:t>
+            </a:r>
+          </a:p>
+        </p:txBody>
+      </p:sp>
+      <p:sp>
+        <p:nvSpPr>
+          <p:cNvPr id="21" name="Rectangle 20">
+            <a:extLst>
+              <a:ext uri="{FF2B5EF4-FFF2-40B4-BE49-F238E27FC236}">
+                <a16:creationId xmlns:a16="http://schemas.microsoft.com/office/drawing/2014/main" id="{4D548FAC-CE06-5F17-3F82-A948AA644FB9}"/>
+              </a:ext>
+            </a:extLst>
+          </p:cNvPr>
+          <p:cNvSpPr/>
+          <p:nvPr/>
+        </p:nvSpPr>
+        <p:spPr>
+          <a:xfrm>
+            <a:off x="1695450" y="1248440"/>
+            <a:ext cx="822960" cy="822960"/>
+          </a:xfrm>
+          <a:prstGeom prst="rect">
+            <a:avLst/>
+          </a:prstGeom>
+          <a:solidFill>
+            <a:schemeClr val="bg1"/>
+          </a:solidFill>
+          <a:ln w="19050">
+            <a:solidFill>
+              <a:schemeClr val="tx1"/>
+            </a:solidFill>
+          </a:ln>
+        </p:spPr>
+        <p:style>
+          <a:lnRef idx="2">
+            <a:schemeClr val="accent1">
+              <a:shade val="15000"/>
+            </a:schemeClr>
+          </a:lnRef>
+          <a:fillRef idx="1">
+            <a:schemeClr val="accent1"/>
+          </a:fillRef>
+          <a:effectRef idx="0">
+            <a:schemeClr val="accent1"/>
+          </a:effectRef>
+          <a:fontRef idx="minor">
+            <a:schemeClr val="lt1"/>
+          </a:fontRef>
+        </p:style>
+        <p:txBody>
+          <a:bodyPr wrap="none" rtlCol="0" anchor="ctr"/>
+          <a:lstStyle/>
+          <a:p>
+            <a:pPr algn="ctr"/>
+            <a:r>
+              <a:rPr lang="en-GB" sz="1300" dirty="0">
+                <a:solidFill>
+                  <a:sysClr val="windowText" lastClr="000000"/>
+                </a:solidFill>
+              </a:rPr>
+              <a:t>Number of</a:t>
+            </a:r>
+          </a:p>
+          <a:p>
+            <a:pPr algn="ctr"/>
+            <a:r>
+              <a:rPr lang="en-GB" sz="1300" dirty="0">
+                <a:solidFill>
+                  <a:sysClr val="windowText" lastClr="000000"/>
+                </a:solidFill>
+              </a:rPr>
+              <a:t>capitula</a:t>
+            </a:r>
+          </a:p>
+        </p:txBody>
+      </p:sp>
+      <p:sp>
+        <p:nvSpPr>
+          <p:cNvPr id="22" name="Rectangle 21">
+            <a:extLst>
+              <a:ext uri="{FF2B5EF4-FFF2-40B4-BE49-F238E27FC236}">
+                <a16:creationId xmlns:a16="http://schemas.microsoft.com/office/drawing/2014/main" id="{E5AD32B6-2518-41FA-1625-4778EFE01139}"/>
+              </a:ext>
+            </a:extLst>
+          </p:cNvPr>
+          <p:cNvSpPr/>
+          <p:nvPr/>
+        </p:nvSpPr>
+        <p:spPr>
+          <a:xfrm>
+            <a:off x="375332" y="1248440"/>
+            <a:ext cx="822960" cy="822960"/>
+          </a:xfrm>
+          <a:prstGeom prst="rect">
+            <a:avLst/>
+          </a:prstGeom>
+          <a:solidFill>
+            <a:schemeClr val="bg1"/>
+          </a:solidFill>
+          <a:ln w="19050">
+            <a:solidFill>
+              <a:schemeClr val="tx1"/>
+            </a:solidFill>
+          </a:ln>
+        </p:spPr>
+        <p:style>
+          <a:lnRef idx="2">
+            <a:schemeClr val="accent1">
+              <a:shade val="15000"/>
+            </a:schemeClr>
+          </a:lnRef>
+          <a:fillRef idx="1">
+            <a:schemeClr val="accent1"/>
+          </a:fillRef>
+          <a:effectRef idx="0">
+            <a:schemeClr val="accent1"/>
+          </a:effectRef>
+          <a:fontRef idx="minor">
+            <a:schemeClr val="lt1"/>
+          </a:fontRef>
+        </p:style>
+        <p:txBody>
+          <a:bodyPr wrap="none" rtlCol="0" anchor="ctr"/>
+          <a:lstStyle/>
+          <a:p>
+            <a:pPr algn="ctr"/>
+            <a:r>
+              <a:rPr lang="en-GB" sz="1300" dirty="0">
+                <a:solidFill>
+                  <a:sysClr val="windowText" lastClr="000000"/>
+                </a:solidFill>
+              </a:rPr>
+              <a:t>Capitulum</a:t>
+            </a:r>
+          </a:p>
+          <a:p>
+            <a:pPr algn="ctr"/>
+            <a:r>
+              <a:rPr lang="en-GB" sz="1300" dirty="0">
+                <a:solidFill>
+                  <a:sysClr val="windowText" lastClr="000000"/>
+                </a:solidFill>
+              </a:rPr>
+              <a:t>height</a:t>
+            </a:r>
+          </a:p>
+        </p:txBody>
+      </p:sp>
+      <p:sp>
+        <p:nvSpPr>
+          <p:cNvPr id="23" name="Rectangle 22">
+            <a:extLst>
+              <a:ext uri="{FF2B5EF4-FFF2-40B4-BE49-F238E27FC236}">
+                <a16:creationId xmlns:a16="http://schemas.microsoft.com/office/drawing/2014/main" id="{F3EBAB62-4124-1D9C-AA96-F87F777B384D}"/>
+              </a:ext>
+            </a:extLst>
+          </p:cNvPr>
+          <p:cNvSpPr/>
+          <p:nvPr/>
+        </p:nvSpPr>
+        <p:spPr>
+          <a:xfrm>
+            <a:off x="375332" y="2540352"/>
+            <a:ext cx="822960" cy="822960"/>
+          </a:xfrm>
+          <a:prstGeom prst="rect">
+            <a:avLst/>
+          </a:prstGeom>
+          <a:solidFill>
+            <a:schemeClr val="bg1"/>
+          </a:solidFill>
+          <a:ln w="19050">
+            <a:solidFill>
+              <a:schemeClr val="tx1"/>
+            </a:solidFill>
+          </a:ln>
+        </p:spPr>
+        <p:style>
+          <a:lnRef idx="2">
+            <a:schemeClr val="accent1">
+              <a:shade val="15000"/>
+            </a:schemeClr>
+          </a:lnRef>
+          <a:fillRef idx="1">
+            <a:schemeClr val="accent1"/>
+          </a:fillRef>
+          <a:effectRef idx="0">
+            <a:schemeClr val="accent1"/>
+          </a:effectRef>
+          <a:fontRef idx="minor">
+            <a:schemeClr val="lt1"/>
+          </a:fontRef>
+        </p:style>
+        <p:txBody>
+          <a:bodyPr wrap="none" rtlCol="0" anchor="ctr"/>
+          <a:lstStyle/>
+          <a:p>
+            <a:pPr algn="ctr"/>
+            <a:r>
+              <a:rPr lang="en-GB" sz="1300" dirty="0">
+                <a:solidFill>
+                  <a:sysClr val="windowText" lastClr="000000"/>
+                </a:solidFill>
+              </a:rPr>
+              <a:t>Number of</a:t>
+            </a:r>
+          </a:p>
+          <a:p>
+            <a:pPr algn="ctr"/>
+            <a:r>
+              <a:rPr lang="en-GB" sz="1300" dirty="0">
+                <a:solidFill>
+                  <a:sysClr val="windowText" lastClr="000000"/>
+                </a:solidFill>
+              </a:rPr>
+              <a:t>seeds per</a:t>
+            </a:r>
+          </a:p>
+          <a:p>
+            <a:pPr algn="ctr"/>
+            <a:r>
+              <a:rPr lang="en-GB" sz="1300" dirty="0">
+                <a:solidFill>
+                  <a:sysClr val="windowText" lastClr="000000"/>
+                </a:solidFill>
+              </a:rPr>
+              <a:t>capitulum</a:t>
+            </a:r>
+          </a:p>
+        </p:txBody>
+      </p:sp>
+      <p:sp>
+        <p:nvSpPr>
+          <p:cNvPr id="24" name="Rectangle 23">
+            <a:extLst>
+              <a:ext uri="{FF2B5EF4-FFF2-40B4-BE49-F238E27FC236}">
+                <a16:creationId xmlns:a16="http://schemas.microsoft.com/office/drawing/2014/main" id="{CE970A35-CDC8-3EDD-7C0D-F3C8BD96CC30}"/>
+              </a:ext>
+            </a:extLst>
+          </p:cNvPr>
+          <p:cNvSpPr/>
+          <p:nvPr/>
+        </p:nvSpPr>
+        <p:spPr>
+          <a:xfrm>
+            <a:off x="379142" y="3832264"/>
+            <a:ext cx="822960" cy="822960"/>
+          </a:xfrm>
+          <a:prstGeom prst="rect">
+            <a:avLst/>
+          </a:prstGeom>
+          <a:solidFill>
+            <a:schemeClr val="bg1"/>
+          </a:solidFill>
+          <a:ln w="19050">
+            <a:solidFill>
+              <a:schemeClr val="tx1"/>
+            </a:solidFill>
+          </a:ln>
+        </p:spPr>
+        <p:style>
+          <a:lnRef idx="2">
+            <a:schemeClr val="accent1">
+              <a:shade val="15000"/>
+            </a:schemeClr>
+          </a:lnRef>
+          <a:fillRef idx="1">
+            <a:schemeClr val="accent1"/>
+          </a:fillRef>
+          <a:effectRef idx="0">
+            <a:schemeClr val="accent1"/>
+          </a:effectRef>
+          <a:fontRef idx="minor">
+            <a:schemeClr val="lt1"/>
+          </a:fontRef>
+        </p:style>
+        <p:txBody>
+          <a:bodyPr wrap="none" rtlCol="0" anchor="ctr"/>
+          <a:lstStyle/>
+          <a:p>
+            <a:pPr algn="ctr"/>
+            <a:r>
+              <a:rPr lang="en-GB" sz="1300" dirty="0">
+                <a:solidFill>
+                  <a:sysClr val="windowText" lastClr="000000"/>
+                </a:solidFill>
+              </a:rPr>
+              <a:t>Wind</a:t>
+            </a:r>
+          </a:p>
+          <a:p>
+            <a:pPr algn="ctr"/>
+            <a:r>
+              <a:rPr lang="en-GB" sz="1300" dirty="0">
+                <a:solidFill>
+                  <a:sysClr val="windowText" lastClr="000000"/>
+                </a:solidFill>
+              </a:rPr>
+              <a:t>dispersal</a:t>
+            </a:r>
+          </a:p>
+          <a:p>
+            <a:pPr algn="ctr"/>
+            <a:r>
+              <a:rPr lang="en-GB" sz="1300" dirty="0">
+                <a:solidFill>
+                  <a:sysClr val="windowText" lastClr="000000"/>
+                </a:solidFill>
+              </a:rPr>
+              <a:t>distance</a:t>
+            </a:r>
+          </a:p>
+        </p:txBody>
+      </p:sp>
+      <p:sp>
+        <p:nvSpPr>
+          <p:cNvPr id="26" name="Rectangle 25">
+            <a:extLst>
+              <a:ext uri="{FF2B5EF4-FFF2-40B4-BE49-F238E27FC236}">
+                <a16:creationId xmlns:a16="http://schemas.microsoft.com/office/drawing/2014/main" id="{BC873109-7C0A-2540-9FC2-1BB86DA53798}"/>
+              </a:ext>
+            </a:extLst>
+          </p:cNvPr>
+          <p:cNvSpPr/>
+          <p:nvPr/>
+        </p:nvSpPr>
+        <p:spPr>
+          <a:xfrm>
+            <a:off x="375332" y="5124176"/>
+            <a:ext cx="822960" cy="822960"/>
+          </a:xfrm>
+          <a:prstGeom prst="rect">
+            <a:avLst/>
+          </a:prstGeom>
+          <a:solidFill>
+            <a:schemeClr val="bg1"/>
+          </a:solidFill>
+          <a:ln w="19050">
+            <a:solidFill>
+              <a:schemeClr val="tx1"/>
+            </a:solidFill>
+          </a:ln>
+        </p:spPr>
+        <p:style>
+          <a:lnRef idx="2">
+            <a:schemeClr val="accent1">
+              <a:shade val="15000"/>
+            </a:schemeClr>
+          </a:lnRef>
+          <a:fillRef idx="1">
+            <a:schemeClr val="accent1"/>
+          </a:fillRef>
+          <a:effectRef idx="0">
+            <a:schemeClr val="accent1"/>
+          </a:effectRef>
+          <a:fontRef idx="minor">
+            <a:schemeClr val="lt1"/>
+          </a:fontRef>
+        </p:style>
+        <p:txBody>
+          <a:bodyPr wrap="none" rtlCol="0" anchor="ctr"/>
+          <a:lstStyle/>
+          <a:p>
+            <a:pPr algn="ctr"/>
+            <a:r>
+              <a:rPr lang="en-GB" sz="1300" dirty="0">
+                <a:solidFill>
+                  <a:sysClr val="windowText" lastClr="000000"/>
+                </a:solidFill>
+              </a:rPr>
+              <a:t>Ant</a:t>
+            </a:r>
+          </a:p>
+          <a:p>
+            <a:pPr algn="ctr"/>
+            <a:r>
+              <a:rPr lang="en-GB" sz="1300" dirty="0">
+                <a:solidFill>
+                  <a:sysClr val="windowText" lastClr="000000"/>
+                </a:solidFill>
+              </a:rPr>
+              <a:t>dispersal</a:t>
+            </a:r>
+          </a:p>
+          <a:p>
+            <a:pPr algn="ctr"/>
+            <a:r>
+              <a:rPr lang="en-GB" sz="1300" dirty="0">
+                <a:solidFill>
+                  <a:sysClr val="windowText" lastClr="000000"/>
+                </a:solidFill>
+              </a:rPr>
+              <a:t>distance</a:t>
+            </a:r>
+          </a:p>
+        </p:txBody>
+      </p:sp>
+      <p:sp>
+        <p:nvSpPr>
+          <p:cNvPr id="27" name="Rectangle 26">
+            <a:extLst>
+              <a:ext uri="{FF2B5EF4-FFF2-40B4-BE49-F238E27FC236}">
+                <a16:creationId xmlns:a16="http://schemas.microsoft.com/office/drawing/2014/main" id="{6673D223-953A-FF63-7042-0929279F47AB}"/>
+              </a:ext>
+            </a:extLst>
+          </p:cNvPr>
+          <p:cNvSpPr/>
+          <p:nvPr/>
+        </p:nvSpPr>
+        <p:spPr>
+          <a:xfrm>
+            <a:off x="1695450" y="5124176"/>
+            <a:ext cx="822960" cy="822960"/>
+          </a:xfrm>
+          <a:prstGeom prst="rect">
+            <a:avLst/>
+          </a:prstGeom>
+          <a:solidFill>
+            <a:schemeClr val="bg1"/>
+          </a:solidFill>
+          <a:ln w="19050">
+            <a:solidFill>
+              <a:schemeClr val="tx1"/>
+            </a:solidFill>
+          </a:ln>
+        </p:spPr>
+        <p:style>
+          <a:lnRef idx="2">
+            <a:schemeClr val="accent1">
+              <a:shade val="15000"/>
+            </a:schemeClr>
+          </a:lnRef>
+          <a:fillRef idx="1">
+            <a:schemeClr val="accent1"/>
+          </a:fillRef>
+          <a:effectRef idx="0">
+            <a:schemeClr val="accent1"/>
+          </a:effectRef>
+          <a:fontRef idx="minor">
+            <a:schemeClr val="lt1"/>
+          </a:fontRef>
+        </p:style>
+        <p:txBody>
+          <a:bodyPr wrap="none" rtlCol="0" anchor="ctr"/>
+          <a:lstStyle/>
+          <a:p>
+            <a:pPr algn="ctr"/>
+            <a:r>
+              <a:rPr lang="en-GB" sz="1300" dirty="0">
+                <a:solidFill>
+                  <a:sysClr val="windowText" lastClr="000000"/>
+                </a:solidFill>
+              </a:rPr>
+              <a:t>Post-</a:t>
+            </a:r>
+          </a:p>
+          <a:p>
+            <a:pPr algn="ctr"/>
+            <a:r>
+              <a:rPr lang="en-GB" sz="1300" dirty="0">
+                <a:solidFill>
+                  <a:sysClr val="windowText" lastClr="000000"/>
+                </a:solidFill>
+              </a:rPr>
+              <a:t>dispersal</a:t>
+            </a:r>
+          </a:p>
+          <a:p>
+            <a:pPr algn="ctr"/>
+            <a:r>
+              <a:rPr lang="en-GB" sz="1300" dirty="0">
+                <a:solidFill>
+                  <a:sysClr val="windowText" lastClr="000000"/>
+                </a:solidFill>
+              </a:rPr>
+              <a:t>predation</a:t>
+            </a:r>
+          </a:p>
+        </p:txBody>
+      </p:sp>
+      <p:sp>
+        <p:nvSpPr>
+          <p:cNvPr id="28" name="Rectangle 27">
+            <a:extLst>
+              <a:ext uri="{FF2B5EF4-FFF2-40B4-BE49-F238E27FC236}">
+                <a16:creationId xmlns:a16="http://schemas.microsoft.com/office/drawing/2014/main" id="{D22A188D-95CA-12FA-5D83-291B1E68588C}"/>
+              </a:ext>
+            </a:extLst>
+          </p:cNvPr>
+          <p:cNvSpPr/>
+          <p:nvPr/>
+        </p:nvSpPr>
+        <p:spPr>
+          <a:xfrm>
+            <a:off x="3015568" y="5124176"/>
+            <a:ext cx="822960" cy="822960"/>
+          </a:xfrm>
+          <a:prstGeom prst="rect">
+            <a:avLst/>
+          </a:prstGeom>
+          <a:solidFill>
+            <a:schemeClr val="bg1"/>
+          </a:solidFill>
+          <a:ln w="19050">
+            <a:solidFill>
+              <a:schemeClr val="tx1"/>
+            </a:solidFill>
+          </a:ln>
+        </p:spPr>
+        <p:style>
+          <a:lnRef idx="2">
+            <a:schemeClr val="accent1">
+              <a:shade val="15000"/>
+            </a:schemeClr>
+          </a:lnRef>
+          <a:fillRef idx="1">
+            <a:schemeClr val="accent1"/>
+          </a:fillRef>
+          <a:effectRef idx="0">
+            <a:schemeClr val="accent1"/>
+          </a:effectRef>
+          <a:fontRef idx="minor">
+            <a:schemeClr val="lt1"/>
+          </a:fontRef>
+        </p:style>
+        <p:txBody>
+          <a:bodyPr wrap="none" rtlCol="0" anchor="ctr"/>
+          <a:lstStyle/>
+          <a:p>
+            <a:pPr algn="ctr"/>
+            <a:r>
+              <a:rPr lang="en-GB" sz="1300" dirty="0">
+                <a:solidFill>
+                  <a:sysClr val="windowText" lastClr="000000"/>
+                </a:solidFill>
+              </a:rPr>
+              <a:t>Establish</a:t>
+            </a:r>
+          </a:p>
+          <a:p>
+            <a:pPr algn="ctr"/>
+            <a:r>
+              <a:rPr lang="en-GB" sz="1300" dirty="0">
+                <a:solidFill>
+                  <a:sysClr val="windowText" lastClr="000000"/>
+                </a:solidFill>
+              </a:rPr>
+              <a:t>from seed</a:t>
+            </a:r>
+          </a:p>
+        </p:txBody>
+      </p:sp>
+      <p:sp>
+        <p:nvSpPr>
+          <p:cNvPr id="29" name="Rectangle 28">
+            <a:extLst>
+              <a:ext uri="{FF2B5EF4-FFF2-40B4-BE49-F238E27FC236}">
+                <a16:creationId xmlns:a16="http://schemas.microsoft.com/office/drawing/2014/main" id="{26916849-E67F-B643-81AC-5669BBB42997}"/>
+              </a:ext>
+            </a:extLst>
+          </p:cNvPr>
+          <p:cNvSpPr/>
+          <p:nvPr/>
+        </p:nvSpPr>
+        <p:spPr>
+          <a:xfrm>
+            <a:off x="4335686" y="5124176"/>
+            <a:ext cx="822960" cy="822960"/>
+          </a:xfrm>
+          <a:prstGeom prst="rect">
+            <a:avLst/>
+          </a:prstGeom>
+          <a:solidFill>
+            <a:schemeClr val="bg1"/>
+          </a:solidFill>
+          <a:ln w="19050">
+            <a:solidFill>
+              <a:schemeClr val="tx1"/>
+            </a:solidFill>
+          </a:ln>
+        </p:spPr>
+        <p:style>
+          <a:lnRef idx="2">
+            <a:schemeClr val="accent1">
+              <a:shade val="15000"/>
+            </a:schemeClr>
+          </a:lnRef>
+          <a:fillRef idx="1">
+            <a:schemeClr val="accent1"/>
+          </a:fillRef>
+          <a:effectRef idx="0">
+            <a:schemeClr val="accent1"/>
+          </a:effectRef>
+          <a:fontRef idx="minor">
+            <a:schemeClr val="lt1"/>
+          </a:fontRef>
+        </p:style>
+        <p:txBody>
+          <a:bodyPr wrap="none" rtlCol="0" anchor="ctr"/>
+          <a:lstStyle/>
+          <a:p>
+            <a:pPr algn="ctr"/>
+            <a:r>
+              <a:rPr lang="en-GB" sz="1300" dirty="0">
+                <a:solidFill>
+                  <a:sysClr val="windowText" lastClr="000000"/>
+                </a:solidFill>
+              </a:rPr>
+              <a:t>Initial size</a:t>
+            </a:r>
+          </a:p>
+          <a:p>
+            <a:pPr algn="ctr"/>
+            <a:r>
+              <a:rPr lang="en-GB" sz="1300" dirty="0">
+                <a:solidFill>
+                  <a:sysClr val="windowText" lastClr="000000"/>
+                </a:solidFill>
+              </a:rPr>
+              <a:t>upon</a:t>
+            </a:r>
+          </a:p>
+          <a:p>
+            <a:pPr algn="ctr"/>
+            <a:r>
+              <a:rPr lang="en-GB" sz="1300" dirty="0">
+                <a:solidFill>
+                  <a:sysClr val="windowText" lastClr="000000"/>
+                </a:solidFill>
+              </a:rPr>
+              <a:t>establish</a:t>
+            </a:r>
+          </a:p>
+        </p:txBody>
+      </p:sp>
+      <p:sp>
+        <p:nvSpPr>
+          <p:cNvPr id="30" name="Rectangle 29">
+            <a:extLst>
+              <a:ext uri="{FF2B5EF4-FFF2-40B4-BE49-F238E27FC236}">
+                <a16:creationId xmlns:a16="http://schemas.microsoft.com/office/drawing/2014/main" id="{E621315A-073A-3896-F1E1-C05047642C32}"/>
+              </a:ext>
+            </a:extLst>
+          </p:cNvPr>
+          <p:cNvSpPr/>
+          <p:nvPr/>
+        </p:nvSpPr>
+        <p:spPr>
+          <a:xfrm>
+            <a:off x="4335686" y="3832264"/>
+            <a:ext cx="822960" cy="822960"/>
+          </a:xfrm>
+          <a:prstGeom prst="rect">
+            <a:avLst/>
+          </a:prstGeom>
+          <a:solidFill>
+            <a:schemeClr val="bg1"/>
+          </a:solidFill>
+          <a:ln w="19050">
+            <a:solidFill>
+              <a:schemeClr val="tx1"/>
+            </a:solidFill>
+          </a:ln>
+        </p:spPr>
+        <p:style>
+          <a:lnRef idx="2">
+            <a:schemeClr val="accent1">
+              <a:shade val="15000"/>
+            </a:schemeClr>
+          </a:lnRef>
+          <a:fillRef idx="1">
+            <a:schemeClr val="accent1"/>
+          </a:fillRef>
+          <a:effectRef idx="0">
+            <a:schemeClr val="accent1"/>
+          </a:effectRef>
+          <a:fontRef idx="minor">
+            <a:schemeClr val="lt1"/>
+          </a:fontRef>
+        </p:style>
+        <p:txBody>
+          <a:bodyPr wrap="none" rtlCol="0" anchor="ctr"/>
+          <a:lstStyle/>
+          <a:p>
+            <a:pPr algn="ctr"/>
+            <a:r>
+              <a:rPr lang="en-GB" sz="1300" dirty="0">
+                <a:solidFill>
+                  <a:sysClr val="windowText" lastClr="000000"/>
+                </a:solidFill>
+              </a:rPr>
+              <a:t>Rosette</a:t>
+            </a:r>
+          </a:p>
+          <a:p>
+            <a:pPr algn="ctr"/>
+            <a:r>
+              <a:rPr lang="en-GB" sz="1300" dirty="0">
+                <a:solidFill>
+                  <a:sysClr val="windowText" lastClr="000000"/>
+                </a:solidFill>
+              </a:rPr>
+              <a:t>survival</a:t>
+            </a:r>
+          </a:p>
+          <a:p>
+            <a:pPr algn="ctr"/>
+            <a:r>
+              <a:rPr lang="en-GB" sz="1300" dirty="0">
+                <a:solidFill>
+                  <a:sysClr val="windowText" lastClr="000000"/>
+                </a:solidFill>
+              </a:rPr>
+              <a:t>over winter</a:t>
+            </a:r>
+          </a:p>
+        </p:txBody>
+      </p:sp>
+      <p:sp>
+        <p:nvSpPr>
+          <p:cNvPr id="31" name="Rectangle 30">
+            <a:extLst>
+              <a:ext uri="{FF2B5EF4-FFF2-40B4-BE49-F238E27FC236}">
+                <a16:creationId xmlns:a16="http://schemas.microsoft.com/office/drawing/2014/main" id="{FDBD619C-2355-268C-6D71-F82F3D607B5A}"/>
+              </a:ext>
+            </a:extLst>
+          </p:cNvPr>
+          <p:cNvSpPr/>
+          <p:nvPr/>
+        </p:nvSpPr>
+        <p:spPr>
+          <a:xfrm>
+            <a:off x="5715000" y="1248440"/>
+            <a:ext cx="822960" cy="822960"/>
+          </a:xfrm>
+          <a:prstGeom prst="rect">
+            <a:avLst/>
+          </a:prstGeom>
+          <a:solidFill>
+            <a:schemeClr val="bg1"/>
+          </a:solidFill>
+          <a:ln w="19050">
+            <a:solidFill>
+              <a:schemeClr val="tx1"/>
+            </a:solidFill>
+          </a:ln>
+        </p:spPr>
+        <p:style>
+          <a:lnRef idx="2">
+            <a:schemeClr val="accent1">
+              <a:shade val="15000"/>
+            </a:schemeClr>
+          </a:lnRef>
+          <a:fillRef idx="1">
+            <a:schemeClr val="accent1"/>
+          </a:fillRef>
+          <a:effectRef idx="0">
+            <a:schemeClr val="accent1"/>
+          </a:effectRef>
+          <a:fontRef idx="minor">
+            <a:schemeClr val="lt1"/>
+          </a:fontRef>
+        </p:style>
+        <p:txBody>
+          <a:bodyPr wrap="none" rtlCol="0" anchor="ctr"/>
+          <a:lstStyle/>
+          <a:p>
+            <a:pPr algn="ctr"/>
+            <a:r>
+              <a:rPr lang="en-GB" sz="1300" dirty="0">
+                <a:solidFill>
+                  <a:sysClr val="windowText" lastClr="000000"/>
+                </a:solidFill>
+              </a:rPr>
+              <a:t>Entry into</a:t>
+            </a:r>
+          </a:p>
+          <a:p>
+            <a:pPr algn="ctr"/>
+            <a:r>
+              <a:rPr lang="en-GB" sz="1300" dirty="0">
+                <a:solidFill>
+                  <a:sysClr val="windowText" lastClr="000000"/>
+                </a:solidFill>
+              </a:rPr>
+              <a:t>seed bank</a:t>
+            </a:r>
+          </a:p>
+        </p:txBody>
+      </p:sp>
+      <p:sp>
+        <p:nvSpPr>
+          <p:cNvPr id="33" name="Rectangle 32">
+            <a:extLst>
+              <a:ext uri="{FF2B5EF4-FFF2-40B4-BE49-F238E27FC236}">
+                <a16:creationId xmlns:a16="http://schemas.microsoft.com/office/drawing/2014/main" id="{E15254B8-464B-D71D-A8DF-A3E83D6DD5DE}"/>
+              </a:ext>
+            </a:extLst>
+          </p:cNvPr>
+          <p:cNvSpPr/>
+          <p:nvPr/>
+        </p:nvSpPr>
+        <p:spPr>
+          <a:xfrm>
+            <a:off x="5715000" y="2540352"/>
+            <a:ext cx="822960" cy="822960"/>
+          </a:xfrm>
+          <a:prstGeom prst="rect">
+            <a:avLst/>
+          </a:prstGeom>
+          <a:solidFill>
+            <a:schemeClr val="bg1"/>
+          </a:solidFill>
+          <a:ln w="19050">
+            <a:solidFill>
+              <a:schemeClr val="tx1"/>
+            </a:solidFill>
+          </a:ln>
+        </p:spPr>
+        <p:style>
+          <a:lnRef idx="2">
+            <a:schemeClr val="accent1">
+              <a:shade val="15000"/>
+            </a:schemeClr>
+          </a:lnRef>
+          <a:fillRef idx="1">
+            <a:schemeClr val="accent1"/>
+          </a:fillRef>
+          <a:effectRef idx="0">
+            <a:schemeClr val="accent1"/>
+          </a:effectRef>
+          <a:fontRef idx="minor">
+            <a:schemeClr val="lt1"/>
+          </a:fontRef>
+        </p:style>
+        <p:txBody>
+          <a:bodyPr wrap="none" rtlCol="0" anchor="ctr"/>
+          <a:lstStyle/>
+          <a:p>
+            <a:pPr algn="ctr"/>
+            <a:r>
+              <a:rPr lang="en-GB" sz="1300" dirty="0">
+                <a:solidFill>
+                  <a:sysClr val="windowText" lastClr="000000"/>
+                </a:solidFill>
+              </a:rPr>
+              <a:t>Establish</a:t>
+            </a:r>
+          </a:p>
+          <a:p>
+            <a:pPr algn="ctr"/>
+            <a:r>
+              <a:rPr lang="en-GB" sz="1300" dirty="0">
+                <a:solidFill>
+                  <a:sysClr val="windowText" lastClr="000000"/>
+                </a:solidFill>
+              </a:rPr>
+              <a:t>from seed</a:t>
+            </a:r>
+          </a:p>
+          <a:p>
+            <a:pPr algn="ctr"/>
+            <a:r>
+              <a:rPr lang="en-GB" sz="1300" dirty="0">
+                <a:solidFill>
+                  <a:sysClr val="windowText" lastClr="000000"/>
+                </a:solidFill>
+              </a:rPr>
+              <a:t>bank</a:t>
+            </a:r>
+          </a:p>
+        </p:txBody>
+      </p:sp>
+      <p:sp>
+        <p:nvSpPr>
+          <p:cNvPr id="34" name="Rectangle 33">
+            <a:extLst>
+              <a:ext uri="{FF2B5EF4-FFF2-40B4-BE49-F238E27FC236}">
+                <a16:creationId xmlns:a16="http://schemas.microsoft.com/office/drawing/2014/main" id="{3DA85F75-7F98-9654-2E37-5901FFE22A97}"/>
+              </a:ext>
+            </a:extLst>
+          </p:cNvPr>
+          <p:cNvSpPr/>
+          <p:nvPr/>
+        </p:nvSpPr>
+        <p:spPr>
+          <a:xfrm>
+            <a:off x="5715000" y="3832264"/>
+            <a:ext cx="822960" cy="822960"/>
+          </a:xfrm>
+          <a:prstGeom prst="rect">
+            <a:avLst/>
+          </a:prstGeom>
+          <a:solidFill>
+            <a:schemeClr val="bg1"/>
+          </a:solidFill>
+          <a:ln w="19050">
+            <a:solidFill>
+              <a:schemeClr val="tx1"/>
+            </a:solidFill>
+          </a:ln>
+        </p:spPr>
+        <p:style>
+          <a:lnRef idx="2">
+            <a:schemeClr val="accent1">
+              <a:shade val="15000"/>
+            </a:schemeClr>
+          </a:lnRef>
+          <a:fillRef idx="1">
+            <a:schemeClr val="accent1"/>
+          </a:fillRef>
+          <a:effectRef idx="0">
+            <a:schemeClr val="accent1"/>
+          </a:effectRef>
+          <a:fontRef idx="minor">
+            <a:schemeClr val="lt1"/>
+          </a:fontRef>
+        </p:style>
+        <p:txBody>
+          <a:bodyPr wrap="none" rtlCol="0" anchor="ctr"/>
+          <a:lstStyle/>
+          <a:p>
+            <a:pPr algn="ctr"/>
+            <a:r>
+              <a:rPr lang="en-GB" sz="1300" dirty="0">
+                <a:solidFill>
+                  <a:sysClr val="windowText" lastClr="000000"/>
+                </a:solidFill>
+              </a:rPr>
+              <a:t>Seed bank</a:t>
+            </a:r>
+          </a:p>
+          <a:p>
+            <a:pPr algn="ctr"/>
+            <a:r>
+              <a:rPr lang="en-GB" sz="1300" dirty="0">
+                <a:solidFill>
+                  <a:sysClr val="windowText" lastClr="000000"/>
+                </a:solidFill>
+              </a:rPr>
+              <a:t>survival</a:t>
+            </a:r>
+          </a:p>
+          <a:p>
+            <a:pPr algn="ctr"/>
+            <a:r>
+              <a:rPr lang="en-GB" sz="1300" dirty="0">
+                <a:solidFill>
+                  <a:sysClr val="windowText" lastClr="000000"/>
+                </a:solidFill>
+              </a:rPr>
+              <a:t>over winter</a:t>
+            </a:r>
+          </a:p>
+        </p:txBody>
+      </p:sp>
+      <p:sp>
+        <p:nvSpPr>
+          <p:cNvPr id="35" name="Rectangle 34">
+            <a:extLst>
+              <a:ext uri="{FF2B5EF4-FFF2-40B4-BE49-F238E27FC236}">
+                <a16:creationId xmlns:a16="http://schemas.microsoft.com/office/drawing/2014/main" id="{825351B6-8395-BD45-14D3-92E4883B3F8D}"/>
+              </a:ext>
+            </a:extLst>
+          </p:cNvPr>
+          <p:cNvSpPr/>
+          <p:nvPr/>
+        </p:nvSpPr>
+        <p:spPr>
+          <a:xfrm>
+            <a:off x="4335686" y="2540352"/>
+            <a:ext cx="822960" cy="822960"/>
+          </a:xfrm>
+          <a:prstGeom prst="rect">
+            <a:avLst/>
+          </a:prstGeom>
+          <a:solidFill>
+            <a:schemeClr val="bg1"/>
+          </a:solidFill>
+          <a:ln w="19050">
+            <a:solidFill>
+              <a:schemeClr val="tx1"/>
+            </a:solidFill>
+          </a:ln>
+        </p:spPr>
+        <p:style>
+          <a:lnRef idx="2">
+            <a:schemeClr val="accent1">
+              <a:shade val="15000"/>
+            </a:schemeClr>
+          </a:lnRef>
+          <a:fillRef idx="1">
+            <a:schemeClr val="accent1"/>
+          </a:fillRef>
+          <a:effectRef idx="0">
+            <a:schemeClr val="accent1"/>
+          </a:effectRef>
+          <a:fontRef idx="minor">
+            <a:schemeClr val="lt1"/>
+          </a:fontRef>
+        </p:style>
+        <p:txBody>
+          <a:bodyPr wrap="none" rtlCol="0" anchor="ctr"/>
+          <a:lstStyle/>
+          <a:p>
+            <a:pPr algn="ctr"/>
+            <a:r>
+              <a:rPr lang="en-GB" sz="1300" dirty="0">
+                <a:solidFill>
+                  <a:sysClr val="windowText" lastClr="000000"/>
+                </a:solidFill>
+              </a:rPr>
+              <a:t>Death</a:t>
+            </a:r>
+          </a:p>
+        </p:txBody>
+      </p:sp>
+      <p:cxnSp>
+        <p:nvCxnSpPr>
+          <p:cNvPr id="37" name="Straight Connector 36">
+            <a:extLst>
+              <a:ext uri="{FF2B5EF4-FFF2-40B4-BE49-F238E27FC236}">
+                <a16:creationId xmlns:a16="http://schemas.microsoft.com/office/drawing/2014/main" id="{AE9DD492-902D-E5FF-9BA3-762A0A1A294E}"/>
+              </a:ext>
+            </a:extLst>
+          </p:cNvPr>
+          <p:cNvCxnSpPr>
+            <a:cxnSpLocks/>
+            <a:endCxn id="23" idx="0"/>
+          </p:cNvCxnSpPr>
+          <p:nvPr/>
+        </p:nvCxnSpPr>
+        <p:spPr>
+          <a:xfrm>
+            <a:off x="786812" y="2071400"/>
+            <a:ext cx="0" cy="468952"/>
+          </a:xfrm>
+          <a:prstGeom prst="line">
+            <a:avLst/>
+          </a:prstGeom>
+          <a:ln w="19050">
+            <a:solidFill>
+              <a:schemeClr val="tx1"/>
+            </a:solidFill>
+          </a:ln>
+        </p:spPr>
+        <p:style>
+          <a:lnRef idx="1">
+            <a:schemeClr val="accent1"/>
+          </a:lnRef>
+          <a:fillRef idx="0">
+            <a:schemeClr val="accent1"/>
+          </a:fillRef>
+          <a:effectRef idx="0">
+            <a:schemeClr val="accent1"/>
+          </a:effectRef>
+          <a:fontRef idx="minor">
+            <a:schemeClr val="tx1"/>
+          </a:fontRef>
+        </p:style>
+      </p:cxnSp>
+      <p:cxnSp>
+        <p:nvCxnSpPr>
+          <p:cNvPr id="43" name="Straight Connector 42">
+            <a:extLst>
+              <a:ext uri="{FF2B5EF4-FFF2-40B4-BE49-F238E27FC236}">
+                <a16:creationId xmlns:a16="http://schemas.microsoft.com/office/drawing/2014/main" id="{14255E7F-7D3C-DD69-FDD4-27031CED410E}"/>
+              </a:ext>
+            </a:extLst>
+          </p:cNvPr>
+          <p:cNvCxnSpPr>
+            <a:cxnSpLocks/>
+          </p:cNvCxnSpPr>
+          <p:nvPr/>
+        </p:nvCxnSpPr>
+        <p:spPr>
+          <a:xfrm>
+            <a:off x="786812" y="3366488"/>
+            <a:ext cx="0" cy="468952"/>
+          </a:xfrm>
+          <a:prstGeom prst="line">
+            <a:avLst/>
+          </a:prstGeom>
+          <a:ln w="19050">
+            <a:solidFill>
+              <a:schemeClr val="tx1"/>
+            </a:solidFill>
+          </a:ln>
+        </p:spPr>
+        <p:style>
+          <a:lnRef idx="1">
+            <a:schemeClr val="accent1"/>
+          </a:lnRef>
+          <a:fillRef idx="0">
+            <a:schemeClr val="accent1"/>
+          </a:fillRef>
+          <a:effectRef idx="0">
+            <a:schemeClr val="accent1"/>
+          </a:effectRef>
+          <a:fontRef idx="minor">
+            <a:schemeClr val="tx1"/>
+          </a:fontRef>
+        </p:style>
+      </p:cxnSp>
+      <p:cxnSp>
+        <p:nvCxnSpPr>
+          <p:cNvPr id="45" name="Straight Connector 44">
+            <a:extLst>
+              <a:ext uri="{FF2B5EF4-FFF2-40B4-BE49-F238E27FC236}">
+                <a16:creationId xmlns:a16="http://schemas.microsoft.com/office/drawing/2014/main" id="{F4F1037F-4146-5499-B5C8-2E838EA4427D}"/>
+              </a:ext>
+            </a:extLst>
+          </p:cNvPr>
+          <p:cNvCxnSpPr>
+            <a:cxnSpLocks/>
+          </p:cNvCxnSpPr>
+          <p:nvPr/>
+        </p:nvCxnSpPr>
+        <p:spPr>
+          <a:xfrm>
+            <a:off x="786812" y="4658400"/>
+            <a:ext cx="0" cy="468952"/>
+          </a:xfrm>
+          <a:prstGeom prst="line">
+            <a:avLst/>
+          </a:prstGeom>
+          <a:ln w="19050">
+            <a:solidFill>
+              <a:schemeClr val="tx1"/>
+            </a:solidFill>
+          </a:ln>
+        </p:spPr>
+        <p:style>
+          <a:lnRef idx="1">
+            <a:schemeClr val="accent1"/>
+          </a:lnRef>
+          <a:fillRef idx="0">
+            <a:schemeClr val="accent1"/>
+          </a:fillRef>
+          <a:effectRef idx="0">
+            <a:schemeClr val="accent1"/>
+          </a:effectRef>
+          <a:fontRef idx="minor">
+            <a:schemeClr val="tx1"/>
+          </a:fontRef>
+        </p:style>
+      </p:cxnSp>
+      <p:cxnSp>
+        <p:nvCxnSpPr>
+          <p:cNvPr id="47" name="Straight Connector 46">
+            <a:extLst>
+              <a:ext uri="{FF2B5EF4-FFF2-40B4-BE49-F238E27FC236}">
+                <a16:creationId xmlns:a16="http://schemas.microsoft.com/office/drawing/2014/main" id="{7891AF78-D99E-4B4E-01FE-A426E289FB7B}"/>
+              </a:ext>
+            </a:extLst>
+          </p:cNvPr>
+          <p:cNvCxnSpPr>
+            <a:cxnSpLocks/>
+          </p:cNvCxnSpPr>
+          <p:nvPr/>
+        </p:nvCxnSpPr>
+        <p:spPr>
+          <a:xfrm rot="10800000">
+            <a:off x="4748213" y="4664388"/>
+            <a:ext cx="0" cy="468952"/>
+          </a:xfrm>
+          <a:prstGeom prst="line">
+            <a:avLst/>
+          </a:prstGeom>
+          <a:ln w="19050">
+            <a:solidFill>
+              <a:schemeClr val="tx1"/>
+            </a:solidFill>
+          </a:ln>
+        </p:spPr>
+        <p:style>
+          <a:lnRef idx="1">
+            <a:schemeClr val="accent1"/>
+          </a:lnRef>
+          <a:fillRef idx="0">
+            <a:schemeClr val="accent1"/>
+          </a:fillRef>
+          <a:effectRef idx="0">
+            <a:schemeClr val="accent1"/>
+          </a:effectRef>
+          <a:fontRef idx="minor">
+            <a:schemeClr val="tx1"/>
+          </a:fontRef>
+        </p:style>
+      </p:cxnSp>
+      <p:cxnSp>
+        <p:nvCxnSpPr>
+          <p:cNvPr id="51" name="Straight Connector 50">
+            <a:extLst>
+              <a:ext uri="{FF2B5EF4-FFF2-40B4-BE49-F238E27FC236}">
+                <a16:creationId xmlns:a16="http://schemas.microsoft.com/office/drawing/2014/main" id="{C831CF2A-8CBE-D1DA-4926-8132E9780C7F}"/>
+              </a:ext>
+            </a:extLst>
+          </p:cNvPr>
+          <p:cNvCxnSpPr>
+            <a:cxnSpLocks/>
+          </p:cNvCxnSpPr>
+          <p:nvPr/>
+        </p:nvCxnSpPr>
+        <p:spPr>
+          <a:xfrm rot="10800000">
+            <a:off x="4748212" y="3363312"/>
+            <a:ext cx="0" cy="468952"/>
+          </a:xfrm>
+          <a:prstGeom prst="line">
+            <a:avLst/>
+          </a:prstGeom>
+          <a:ln w="19050">
+            <a:solidFill>
+              <a:schemeClr val="tx1"/>
+            </a:solidFill>
+          </a:ln>
+        </p:spPr>
+        <p:style>
+          <a:lnRef idx="1">
+            <a:schemeClr val="accent1"/>
+          </a:lnRef>
+          <a:fillRef idx="0">
+            <a:schemeClr val="accent1"/>
+          </a:fillRef>
+          <a:effectRef idx="0">
+            <a:schemeClr val="accent1"/>
+          </a:effectRef>
+          <a:fontRef idx="minor">
+            <a:schemeClr val="tx1"/>
+          </a:fontRef>
+        </p:style>
+      </p:cxnSp>
+      <p:cxnSp>
+        <p:nvCxnSpPr>
+          <p:cNvPr id="57" name="Straight Connector 56">
+            <a:extLst>
+              <a:ext uri="{FF2B5EF4-FFF2-40B4-BE49-F238E27FC236}">
+                <a16:creationId xmlns:a16="http://schemas.microsoft.com/office/drawing/2014/main" id="{FF347596-E078-2893-3886-CC3A15F947FD}"/>
+              </a:ext>
+            </a:extLst>
+          </p:cNvPr>
+          <p:cNvCxnSpPr>
+            <a:cxnSpLocks/>
+            <a:endCxn id="27" idx="1"/>
+          </p:cNvCxnSpPr>
+          <p:nvPr/>
+        </p:nvCxnSpPr>
+        <p:spPr>
+          <a:xfrm flipV="1">
+            <a:off x="1198292" y="5535656"/>
+            <a:ext cx="497158" cy="0"/>
+          </a:xfrm>
+          <a:prstGeom prst="line">
+            <a:avLst/>
+          </a:prstGeom>
+          <a:ln w="19050">
+            <a:solidFill>
+              <a:schemeClr val="tx1"/>
+            </a:solidFill>
+          </a:ln>
+        </p:spPr>
+        <p:style>
+          <a:lnRef idx="1">
+            <a:schemeClr val="accent1"/>
+          </a:lnRef>
+          <a:fillRef idx="0">
+            <a:schemeClr val="accent1"/>
+          </a:fillRef>
+          <a:effectRef idx="0">
+            <a:schemeClr val="accent1"/>
+          </a:effectRef>
+          <a:fontRef idx="minor">
+            <a:schemeClr val="tx1"/>
+          </a:fontRef>
+        </p:style>
+      </p:cxnSp>
+      <p:cxnSp>
+        <p:nvCxnSpPr>
+          <p:cNvPr id="61" name="Straight Connector 60">
+            <a:extLst>
+              <a:ext uri="{FF2B5EF4-FFF2-40B4-BE49-F238E27FC236}">
+                <a16:creationId xmlns:a16="http://schemas.microsoft.com/office/drawing/2014/main" id="{66A58734-D3E1-9EFD-7F15-948E86622F08}"/>
+              </a:ext>
+            </a:extLst>
+          </p:cNvPr>
+          <p:cNvCxnSpPr>
+            <a:cxnSpLocks/>
+          </p:cNvCxnSpPr>
+          <p:nvPr/>
+        </p:nvCxnSpPr>
+        <p:spPr>
+          <a:xfrm flipV="1">
+            <a:off x="2518410" y="5535656"/>
+            <a:ext cx="497158" cy="0"/>
+          </a:xfrm>
+          <a:prstGeom prst="line">
+            <a:avLst/>
+          </a:prstGeom>
+          <a:ln w="19050">
+            <a:solidFill>
+              <a:schemeClr val="tx1"/>
+            </a:solidFill>
+          </a:ln>
+        </p:spPr>
+        <p:style>
+          <a:lnRef idx="1">
+            <a:schemeClr val="accent1"/>
+          </a:lnRef>
+          <a:fillRef idx="0">
+            <a:schemeClr val="accent1"/>
+          </a:fillRef>
+          <a:effectRef idx="0">
+            <a:schemeClr val="accent1"/>
+          </a:effectRef>
+          <a:fontRef idx="minor">
+            <a:schemeClr val="tx1"/>
+          </a:fontRef>
+        </p:style>
+      </p:cxnSp>
+      <p:cxnSp>
+        <p:nvCxnSpPr>
+          <p:cNvPr id="63" name="Straight Connector 62">
+            <a:extLst>
+              <a:ext uri="{FF2B5EF4-FFF2-40B4-BE49-F238E27FC236}">
+                <a16:creationId xmlns:a16="http://schemas.microsoft.com/office/drawing/2014/main" id="{73698E53-6C9D-B210-E99C-71FB671A7636}"/>
+              </a:ext>
+            </a:extLst>
+          </p:cNvPr>
+          <p:cNvCxnSpPr>
+            <a:cxnSpLocks/>
+          </p:cNvCxnSpPr>
+          <p:nvPr/>
+        </p:nvCxnSpPr>
+        <p:spPr>
+          <a:xfrm flipV="1">
+            <a:off x="3838528" y="5535656"/>
+            <a:ext cx="497158" cy="0"/>
+          </a:xfrm>
+          <a:prstGeom prst="line">
+            <a:avLst/>
+          </a:prstGeom>
+          <a:ln w="19050">
+            <a:solidFill>
+              <a:schemeClr val="tx1"/>
+            </a:solidFill>
+          </a:ln>
+        </p:spPr>
+        <p:style>
+          <a:lnRef idx="1">
+            <a:schemeClr val="accent1"/>
+          </a:lnRef>
+          <a:fillRef idx="0">
+            <a:schemeClr val="accent1"/>
+          </a:fillRef>
+          <a:effectRef idx="0">
+            <a:schemeClr val="accent1"/>
+          </a:effectRef>
+          <a:fontRef idx="minor">
+            <a:schemeClr val="tx1"/>
+          </a:fontRef>
+        </p:style>
+      </p:cxnSp>
+      <p:cxnSp>
+        <p:nvCxnSpPr>
+          <p:cNvPr id="65" name="Straight Connector 64">
+            <a:extLst>
+              <a:ext uri="{FF2B5EF4-FFF2-40B4-BE49-F238E27FC236}">
+                <a16:creationId xmlns:a16="http://schemas.microsoft.com/office/drawing/2014/main" id="{AF99E5C3-2B0D-CB8E-20AC-7D39B28076D4}"/>
+              </a:ext>
+            </a:extLst>
+          </p:cNvPr>
+          <p:cNvCxnSpPr>
+            <a:cxnSpLocks/>
+          </p:cNvCxnSpPr>
+          <p:nvPr/>
+        </p:nvCxnSpPr>
+        <p:spPr>
+          <a:xfrm rot="10800000" flipV="1">
+            <a:off x="3838528" y="1667387"/>
+            <a:ext cx="497158" cy="0"/>
+          </a:xfrm>
+          <a:prstGeom prst="line">
+            <a:avLst/>
+          </a:prstGeom>
+          <a:ln w="19050">
+            <a:solidFill>
+              <a:schemeClr val="tx1"/>
+            </a:solidFill>
+          </a:ln>
+        </p:spPr>
+        <p:style>
+          <a:lnRef idx="1">
+            <a:schemeClr val="accent1"/>
+          </a:lnRef>
+          <a:fillRef idx="0">
+            <a:schemeClr val="accent1"/>
+          </a:fillRef>
+          <a:effectRef idx="0">
+            <a:schemeClr val="accent1"/>
+          </a:effectRef>
+          <a:fontRef idx="minor">
+            <a:schemeClr val="tx1"/>
+          </a:fontRef>
+        </p:style>
+      </p:cxnSp>
+      <p:cxnSp>
+        <p:nvCxnSpPr>
+          <p:cNvPr id="68" name="Straight Connector 67">
+            <a:extLst>
+              <a:ext uri="{FF2B5EF4-FFF2-40B4-BE49-F238E27FC236}">
+                <a16:creationId xmlns:a16="http://schemas.microsoft.com/office/drawing/2014/main" id="{E9B23FF1-8D05-B135-C51B-E391A68CE305}"/>
+              </a:ext>
+            </a:extLst>
+          </p:cNvPr>
+          <p:cNvCxnSpPr>
+            <a:cxnSpLocks/>
+          </p:cNvCxnSpPr>
+          <p:nvPr/>
+        </p:nvCxnSpPr>
+        <p:spPr>
+          <a:xfrm rot="10800000" flipV="1">
+            <a:off x="2518410" y="1667387"/>
+            <a:ext cx="497158" cy="0"/>
+          </a:xfrm>
+          <a:prstGeom prst="line">
+            <a:avLst/>
+          </a:prstGeom>
+          <a:ln w="19050">
+            <a:solidFill>
+              <a:schemeClr val="tx1"/>
+            </a:solidFill>
+          </a:ln>
+        </p:spPr>
+        <p:style>
+          <a:lnRef idx="1">
+            <a:schemeClr val="accent1"/>
+          </a:lnRef>
+          <a:fillRef idx="0">
+            <a:schemeClr val="accent1"/>
+          </a:fillRef>
+          <a:effectRef idx="0">
+            <a:schemeClr val="accent1"/>
+          </a:effectRef>
+          <a:fontRef idx="minor">
+            <a:schemeClr val="tx1"/>
+          </a:fontRef>
+        </p:style>
+      </p:cxnSp>
+      <p:cxnSp>
+        <p:nvCxnSpPr>
+          <p:cNvPr id="70" name="Straight Connector 69">
+            <a:extLst>
+              <a:ext uri="{FF2B5EF4-FFF2-40B4-BE49-F238E27FC236}">
+                <a16:creationId xmlns:a16="http://schemas.microsoft.com/office/drawing/2014/main" id="{DE62F9C4-DB98-C758-A0ED-F79DDF965F66}"/>
+              </a:ext>
+            </a:extLst>
+          </p:cNvPr>
+          <p:cNvCxnSpPr>
+            <a:cxnSpLocks/>
+          </p:cNvCxnSpPr>
+          <p:nvPr/>
+        </p:nvCxnSpPr>
+        <p:spPr>
+          <a:xfrm rot="10800000" flipV="1">
+            <a:off x="1193529" y="1667387"/>
+            <a:ext cx="497158" cy="0"/>
+          </a:xfrm>
+          <a:prstGeom prst="line">
+            <a:avLst/>
+          </a:prstGeom>
+          <a:ln w="19050">
+            <a:solidFill>
+              <a:schemeClr val="tx1"/>
+            </a:solidFill>
+          </a:ln>
+        </p:spPr>
+        <p:style>
+          <a:lnRef idx="1">
+            <a:schemeClr val="accent1"/>
+          </a:lnRef>
+          <a:fillRef idx="0">
+            <a:schemeClr val="accent1"/>
+          </a:fillRef>
+          <a:effectRef idx="0">
+            <a:schemeClr val="accent1"/>
+          </a:effectRef>
+          <a:fontRef idx="minor">
+            <a:schemeClr val="tx1"/>
+          </a:fontRef>
+        </p:style>
+      </p:cxnSp>
+      <p:cxnSp>
+        <p:nvCxnSpPr>
+          <p:cNvPr id="72" name="Straight Connector 71">
+            <a:extLst>
+              <a:ext uri="{FF2B5EF4-FFF2-40B4-BE49-F238E27FC236}">
+                <a16:creationId xmlns:a16="http://schemas.microsoft.com/office/drawing/2014/main" id="{978F5365-FEE8-86A5-DCE8-3AC7186319A0}"/>
+              </a:ext>
+            </a:extLst>
+          </p:cNvPr>
+          <p:cNvCxnSpPr>
+            <a:cxnSpLocks/>
+          </p:cNvCxnSpPr>
+          <p:nvPr/>
+        </p:nvCxnSpPr>
+        <p:spPr>
+          <a:xfrm flipV="1">
+            <a:off x="3429000" y="4882155"/>
+            <a:ext cx="0" cy="251186"/>
+          </a:xfrm>
+          <a:prstGeom prst="line">
+            <a:avLst/>
+          </a:prstGeom>
+          <a:ln w="19050">
+            <a:solidFill>
+              <a:schemeClr val="tx1"/>
+            </a:solidFill>
+          </a:ln>
+        </p:spPr>
+        <p:style>
+          <a:lnRef idx="1">
+            <a:schemeClr val="accent1"/>
+          </a:lnRef>
+          <a:fillRef idx="0">
+            <a:schemeClr val="accent1"/>
+          </a:fillRef>
+          <a:effectRef idx="0">
+            <a:schemeClr val="accent1"/>
+          </a:effectRef>
+          <a:fontRef idx="minor">
+            <a:schemeClr val="tx1"/>
+          </a:fontRef>
+        </p:style>
+      </p:cxnSp>
+      <p:cxnSp>
+        <p:nvCxnSpPr>
+          <p:cNvPr id="74" name="Straight Connector 73">
+            <a:extLst>
+              <a:ext uri="{FF2B5EF4-FFF2-40B4-BE49-F238E27FC236}">
+                <a16:creationId xmlns:a16="http://schemas.microsoft.com/office/drawing/2014/main" id="{77FC7A57-AF0D-1419-B50A-DB74D2F98EC9}"/>
+              </a:ext>
+            </a:extLst>
+          </p:cNvPr>
+          <p:cNvCxnSpPr>
+            <a:cxnSpLocks/>
+          </p:cNvCxnSpPr>
+          <p:nvPr/>
+        </p:nvCxnSpPr>
+        <p:spPr>
+          <a:xfrm>
+            <a:off x="3419476" y="4882155"/>
+            <a:ext cx="2039112" cy="0"/>
+          </a:xfrm>
+          <a:prstGeom prst="line">
+            <a:avLst/>
+          </a:prstGeom>
+          <a:ln w="19050">
+            <a:solidFill>
+              <a:schemeClr val="tx1"/>
+            </a:solidFill>
+          </a:ln>
+        </p:spPr>
+        <p:style>
+          <a:lnRef idx="1">
+            <a:schemeClr val="accent1"/>
+          </a:lnRef>
+          <a:fillRef idx="0">
+            <a:schemeClr val="accent1"/>
+          </a:fillRef>
+          <a:effectRef idx="0">
+            <a:schemeClr val="accent1"/>
+          </a:effectRef>
+          <a:fontRef idx="minor">
+            <a:schemeClr val="tx1"/>
+          </a:fontRef>
+        </p:style>
+      </p:cxnSp>
+      <p:cxnSp>
+        <p:nvCxnSpPr>
+          <p:cNvPr id="77" name="Straight Connector 76">
+            <a:extLst>
+              <a:ext uri="{FF2B5EF4-FFF2-40B4-BE49-F238E27FC236}">
+                <a16:creationId xmlns:a16="http://schemas.microsoft.com/office/drawing/2014/main" id="{62622612-2864-F3BF-DBA8-BEB627CD04A2}"/>
+              </a:ext>
+            </a:extLst>
+          </p:cNvPr>
+          <p:cNvCxnSpPr>
+            <a:cxnSpLocks/>
+          </p:cNvCxnSpPr>
+          <p:nvPr/>
+        </p:nvCxnSpPr>
+        <p:spPr>
+          <a:xfrm flipV="1">
+            <a:off x="5451792" y="1496730"/>
+            <a:ext cx="0" cy="3392424"/>
+          </a:xfrm>
+          <a:prstGeom prst="line">
+            <a:avLst/>
+          </a:prstGeom>
+          <a:ln w="19050">
+            <a:solidFill>
+              <a:schemeClr val="tx1"/>
+            </a:solidFill>
+          </a:ln>
+        </p:spPr>
+        <p:style>
+          <a:lnRef idx="1">
+            <a:schemeClr val="accent1"/>
+          </a:lnRef>
+          <a:fillRef idx="0">
+            <a:schemeClr val="accent1"/>
+          </a:fillRef>
+          <a:effectRef idx="0">
+            <a:schemeClr val="accent1"/>
+          </a:effectRef>
+          <a:fontRef idx="minor">
+            <a:schemeClr val="tx1"/>
+          </a:fontRef>
+        </p:style>
+      </p:cxnSp>
+      <p:cxnSp>
+        <p:nvCxnSpPr>
+          <p:cNvPr id="79" name="Straight Connector 78">
+            <a:extLst>
+              <a:ext uri="{FF2B5EF4-FFF2-40B4-BE49-F238E27FC236}">
+                <a16:creationId xmlns:a16="http://schemas.microsoft.com/office/drawing/2014/main" id="{EFF2A8C4-F41D-B0FE-6360-B5C9C77877C9}"/>
+              </a:ext>
+            </a:extLst>
+          </p:cNvPr>
+          <p:cNvCxnSpPr>
+            <a:cxnSpLocks/>
+          </p:cNvCxnSpPr>
+          <p:nvPr/>
+        </p:nvCxnSpPr>
+        <p:spPr>
+          <a:xfrm>
+            <a:off x="5447080" y="1491173"/>
+            <a:ext cx="265176" cy="0"/>
+          </a:xfrm>
+          <a:prstGeom prst="line">
+            <a:avLst/>
+          </a:prstGeom>
+          <a:ln w="19050">
+            <a:solidFill>
+              <a:schemeClr val="tx1"/>
+            </a:solidFill>
+          </a:ln>
+        </p:spPr>
+        <p:style>
+          <a:lnRef idx="1">
+            <a:schemeClr val="accent1"/>
+          </a:lnRef>
+          <a:fillRef idx="0">
+            <a:schemeClr val="accent1"/>
+          </a:fillRef>
+          <a:effectRef idx="0">
+            <a:schemeClr val="accent1"/>
+          </a:effectRef>
+          <a:fontRef idx="minor">
+            <a:schemeClr val="tx1"/>
+          </a:fontRef>
+        </p:style>
+      </p:cxnSp>
+      <p:cxnSp>
+        <p:nvCxnSpPr>
+          <p:cNvPr id="82" name="Straight Connector 81">
+            <a:extLst>
+              <a:ext uri="{FF2B5EF4-FFF2-40B4-BE49-F238E27FC236}">
+                <a16:creationId xmlns:a16="http://schemas.microsoft.com/office/drawing/2014/main" id="{AD1E23F3-7244-B0C7-55DA-47E76C13442E}"/>
+              </a:ext>
+            </a:extLst>
+          </p:cNvPr>
+          <p:cNvCxnSpPr>
+            <a:cxnSpLocks/>
+          </p:cNvCxnSpPr>
+          <p:nvPr/>
+        </p:nvCxnSpPr>
+        <p:spPr>
+          <a:xfrm>
+            <a:off x="6133148" y="2068224"/>
+            <a:ext cx="0" cy="468952"/>
+          </a:xfrm>
+          <a:prstGeom prst="line">
+            <a:avLst/>
+          </a:prstGeom>
+          <a:ln w="19050">
+            <a:solidFill>
+              <a:schemeClr val="tx1"/>
+            </a:solidFill>
+          </a:ln>
+        </p:spPr>
+        <p:style>
+          <a:lnRef idx="1">
+            <a:schemeClr val="accent1"/>
+          </a:lnRef>
+          <a:fillRef idx="0">
+            <a:schemeClr val="accent1"/>
+          </a:fillRef>
+          <a:effectRef idx="0">
+            <a:schemeClr val="accent1"/>
+          </a:effectRef>
+          <a:fontRef idx="minor">
+            <a:schemeClr val="tx1"/>
+          </a:fontRef>
+        </p:style>
+      </p:cxnSp>
+      <p:cxnSp>
+        <p:nvCxnSpPr>
+          <p:cNvPr id="84" name="Straight Connector 83">
+            <a:extLst>
+              <a:ext uri="{FF2B5EF4-FFF2-40B4-BE49-F238E27FC236}">
+                <a16:creationId xmlns:a16="http://schemas.microsoft.com/office/drawing/2014/main" id="{F020B019-21A0-0AAA-497C-F10B199D4777}"/>
+              </a:ext>
+            </a:extLst>
+          </p:cNvPr>
+          <p:cNvCxnSpPr>
+            <a:cxnSpLocks/>
+          </p:cNvCxnSpPr>
+          <p:nvPr/>
+        </p:nvCxnSpPr>
+        <p:spPr>
+          <a:xfrm>
+            <a:off x="6127163" y="3364425"/>
+            <a:ext cx="0" cy="468952"/>
+          </a:xfrm>
+          <a:prstGeom prst="line">
+            <a:avLst/>
+          </a:prstGeom>
+          <a:ln w="19050">
+            <a:solidFill>
+              <a:schemeClr val="tx1"/>
+            </a:solidFill>
+          </a:ln>
+        </p:spPr>
+        <p:style>
+          <a:lnRef idx="1">
+            <a:schemeClr val="accent1"/>
+          </a:lnRef>
+          <a:fillRef idx="0">
+            <a:schemeClr val="accent1"/>
+          </a:fillRef>
+          <a:effectRef idx="0">
+            <a:schemeClr val="accent1"/>
+          </a:effectRef>
+          <a:fontRef idx="minor">
+            <a:schemeClr val="tx1"/>
+          </a:fontRef>
+        </p:style>
+      </p:cxnSp>
+      <p:cxnSp>
+        <p:nvCxnSpPr>
+          <p:cNvPr id="86" name="Straight Connector 85">
+            <a:extLst>
+              <a:ext uri="{FF2B5EF4-FFF2-40B4-BE49-F238E27FC236}">
+                <a16:creationId xmlns:a16="http://schemas.microsoft.com/office/drawing/2014/main" id="{2F3418BB-19DB-CC91-F46E-5EA78762D2ED}"/>
+              </a:ext>
+            </a:extLst>
+          </p:cNvPr>
+          <p:cNvCxnSpPr>
+            <a:cxnSpLocks/>
+          </p:cNvCxnSpPr>
+          <p:nvPr/>
+        </p:nvCxnSpPr>
+        <p:spPr>
+          <a:xfrm flipV="1">
+            <a:off x="3421380" y="2068224"/>
+            <a:ext cx="7620" cy="2179926"/>
+          </a:xfrm>
+          <a:prstGeom prst="line">
+            <a:avLst/>
+          </a:prstGeom>
+          <a:ln w="19050">
+            <a:solidFill>
+              <a:schemeClr val="tx1"/>
+            </a:solidFill>
+          </a:ln>
+        </p:spPr>
+        <p:style>
+          <a:lnRef idx="1">
+            <a:schemeClr val="accent1"/>
+          </a:lnRef>
+          <a:fillRef idx="0">
+            <a:schemeClr val="accent1"/>
+          </a:fillRef>
+          <a:effectRef idx="0">
+            <a:schemeClr val="accent1"/>
+          </a:effectRef>
+          <a:fontRef idx="minor">
+            <a:schemeClr val="tx1"/>
+          </a:fontRef>
+        </p:style>
+      </p:cxnSp>
+      <p:cxnSp>
+        <p:nvCxnSpPr>
+          <p:cNvPr id="88" name="Straight Connector 87">
+            <a:extLst>
+              <a:ext uri="{FF2B5EF4-FFF2-40B4-BE49-F238E27FC236}">
+                <a16:creationId xmlns:a16="http://schemas.microsoft.com/office/drawing/2014/main" id="{E343DD8D-80AD-F548-CC0F-A402C465FB51}"/>
+              </a:ext>
+            </a:extLst>
+          </p:cNvPr>
+          <p:cNvCxnSpPr>
+            <a:cxnSpLocks/>
+          </p:cNvCxnSpPr>
+          <p:nvPr/>
+        </p:nvCxnSpPr>
+        <p:spPr>
+          <a:xfrm>
+            <a:off x="3412808" y="4248150"/>
+            <a:ext cx="914400" cy="0"/>
+          </a:xfrm>
+          <a:prstGeom prst="line">
+            <a:avLst/>
+          </a:prstGeom>
+          <a:ln w="19050">
+            <a:solidFill>
+              <a:schemeClr val="tx1"/>
+            </a:solidFill>
+          </a:ln>
+        </p:spPr>
+        <p:style>
+          <a:lnRef idx="1">
+            <a:schemeClr val="accent1"/>
+          </a:lnRef>
+          <a:fillRef idx="0">
+            <a:schemeClr val="accent1"/>
+          </a:fillRef>
+          <a:effectRef idx="0">
+            <a:schemeClr val="accent1"/>
+          </a:effectRef>
+          <a:fontRef idx="minor">
+            <a:schemeClr val="tx1"/>
+          </a:fontRef>
+        </p:style>
+      </p:cxnSp>
+      <p:cxnSp>
+        <p:nvCxnSpPr>
+          <p:cNvPr id="92" name="Straight Connector 91">
+            <a:extLst>
+              <a:ext uri="{FF2B5EF4-FFF2-40B4-BE49-F238E27FC236}">
+                <a16:creationId xmlns:a16="http://schemas.microsoft.com/office/drawing/2014/main" id="{26F35DB1-82D3-2E4E-D449-2FD1FBE35E3D}"/>
+              </a:ext>
+            </a:extLst>
+          </p:cNvPr>
+          <p:cNvCxnSpPr>
+            <a:cxnSpLocks/>
+          </p:cNvCxnSpPr>
+          <p:nvPr/>
+        </p:nvCxnSpPr>
+        <p:spPr>
+          <a:xfrm flipV="1">
+            <a:off x="5539740" y="2921824"/>
+            <a:ext cx="0" cy="2613832"/>
+          </a:xfrm>
+          <a:prstGeom prst="line">
+            <a:avLst/>
+          </a:prstGeom>
+          <a:ln w="19050">
+            <a:solidFill>
+              <a:schemeClr val="tx1"/>
+            </a:solidFill>
+          </a:ln>
+        </p:spPr>
+        <p:style>
+          <a:lnRef idx="1">
+            <a:schemeClr val="accent1"/>
+          </a:lnRef>
+          <a:fillRef idx="0">
+            <a:schemeClr val="accent1"/>
+          </a:fillRef>
+          <a:effectRef idx="0">
+            <a:schemeClr val="accent1"/>
+          </a:effectRef>
+          <a:fontRef idx="minor">
+            <a:schemeClr val="tx1"/>
+          </a:fontRef>
+        </p:style>
+      </p:cxnSp>
+      <p:cxnSp>
+        <p:nvCxnSpPr>
+          <p:cNvPr id="94" name="Straight Connector 93">
+            <a:extLst>
+              <a:ext uri="{FF2B5EF4-FFF2-40B4-BE49-F238E27FC236}">
+                <a16:creationId xmlns:a16="http://schemas.microsoft.com/office/drawing/2014/main" id="{F8F439D1-58CD-7F84-6A14-5F134284E9BF}"/>
+              </a:ext>
+            </a:extLst>
+          </p:cNvPr>
+          <p:cNvCxnSpPr>
+            <a:cxnSpLocks/>
+          </p:cNvCxnSpPr>
+          <p:nvPr/>
+        </p:nvCxnSpPr>
+        <p:spPr>
+          <a:xfrm>
+            <a:off x="5530582" y="2921824"/>
+            <a:ext cx="182880" cy="0"/>
+          </a:xfrm>
+          <a:prstGeom prst="line">
+            <a:avLst/>
+          </a:prstGeom>
+          <a:ln w="19050">
+            <a:solidFill>
+              <a:schemeClr val="tx1"/>
+            </a:solidFill>
+          </a:ln>
+        </p:spPr>
+        <p:style>
+          <a:lnRef idx="1">
+            <a:schemeClr val="accent1"/>
+          </a:lnRef>
+          <a:fillRef idx="0">
+            <a:schemeClr val="accent1"/>
+          </a:fillRef>
+          <a:effectRef idx="0">
+            <a:schemeClr val="accent1"/>
+          </a:effectRef>
+          <a:fontRef idx="minor">
+            <a:schemeClr val="tx1"/>
+          </a:fontRef>
+        </p:style>
+      </p:cxnSp>
+      <p:cxnSp>
+        <p:nvCxnSpPr>
+          <p:cNvPr id="95" name="Straight Connector 94">
+            <a:extLst>
+              <a:ext uri="{FF2B5EF4-FFF2-40B4-BE49-F238E27FC236}">
+                <a16:creationId xmlns:a16="http://schemas.microsoft.com/office/drawing/2014/main" id="{706BF6A3-A8A2-C981-1744-A114F6EFA706}"/>
+              </a:ext>
+            </a:extLst>
+          </p:cNvPr>
+          <p:cNvCxnSpPr>
+            <a:cxnSpLocks/>
+          </p:cNvCxnSpPr>
+          <p:nvPr/>
+        </p:nvCxnSpPr>
+        <p:spPr>
+          <a:xfrm>
+            <a:off x="5158646" y="5535656"/>
+            <a:ext cx="389207" cy="0"/>
+          </a:xfrm>
+          <a:prstGeom prst="line">
+            <a:avLst/>
+          </a:prstGeom>
+          <a:ln w="19050">
+            <a:solidFill>
+              <a:schemeClr val="tx1"/>
+            </a:solidFill>
+          </a:ln>
+        </p:spPr>
+        <p:style>
+          <a:lnRef idx="1">
+            <a:schemeClr val="accent1"/>
+          </a:lnRef>
+          <a:fillRef idx="0">
+            <a:schemeClr val="accent1"/>
+          </a:fillRef>
+          <a:effectRef idx="0">
+            <a:schemeClr val="accent1"/>
+          </a:effectRef>
+          <a:fontRef idx="minor">
+            <a:schemeClr val="tx1"/>
+          </a:fontRef>
+        </p:style>
+      </p:cxnSp>
+      <p:cxnSp>
+        <p:nvCxnSpPr>
+          <p:cNvPr id="98" name="Straight Connector 97">
+            <a:extLst>
+              <a:ext uri="{FF2B5EF4-FFF2-40B4-BE49-F238E27FC236}">
+                <a16:creationId xmlns:a16="http://schemas.microsoft.com/office/drawing/2014/main" id="{3B8AFEA9-1ED7-D911-0EC3-0FF5D3FFDB6C}"/>
+              </a:ext>
+            </a:extLst>
+          </p:cNvPr>
+          <p:cNvCxnSpPr>
+            <a:cxnSpLocks/>
+          </p:cNvCxnSpPr>
+          <p:nvPr/>
+        </p:nvCxnSpPr>
+        <p:spPr>
+          <a:xfrm>
+            <a:off x="5619641" y="4255324"/>
+            <a:ext cx="91440" cy="0"/>
+          </a:xfrm>
+          <a:prstGeom prst="line">
+            <a:avLst/>
+          </a:prstGeom>
+          <a:ln w="19050">
+            <a:solidFill>
+              <a:schemeClr val="tx1"/>
+            </a:solidFill>
+          </a:ln>
+        </p:spPr>
+        <p:style>
+          <a:lnRef idx="1">
+            <a:schemeClr val="accent1"/>
+          </a:lnRef>
+          <a:fillRef idx="0">
+            <a:schemeClr val="accent1"/>
+          </a:fillRef>
+          <a:effectRef idx="0">
+            <a:schemeClr val="accent1"/>
+          </a:effectRef>
+          <a:fontRef idx="minor">
+            <a:schemeClr val="tx1"/>
+          </a:fontRef>
+        </p:style>
+      </p:cxnSp>
+      <p:cxnSp>
+        <p:nvCxnSpPr>
+          <p:cNvPr id="99" name="Straight Connector 98">
+            <a:extLst>
+              <a:ext uri="{FF2B5EF4-FFF2-40B4-BE49-F238E27FC236}">
+                <a16:creationId xmlns:a16="http://schemas.microsoft.com/office/drawing/2014/main" id="{15C30764-3AAD-12D8-A77A-34C2DE2DFD21}"/>
+              </a:ext>
+            </a:extLst>
+          </p:cNvPr>
+          <p:cNvCxnSpPr>
+            <a:cxnSpLocks/>
+          </p:cNvCxnSpPr>
+          <p:nvPr/>
+        </p:nvCxnSpPr>
+        <p:spPr>
+          <a:xfrm flipV="1">
+            <a:off x="5629165" y="3120231"/>
+            <a:ext cx="0" cy="1143000"/>
+          </a:xfrm>
+          <a:prstGeom prst="line">
+            <a:avLst/>
+          </a:prstGeom>
+          <a:ln w="19050">
+            <a:solidFill>
+              <a:schemeClr val="tx1"/>
+            </a:solidFill>
+          </a:ln>
+        </p:spPr>
+        <p:style>
+          <a:lnRef idx="1">
+            <a:schemeClr val="accent1"/>
+          </a:lnRef>
+          <a:fillRef idx="0">
+            <a:schemeClr val="accent1"/>
+          </a:fillRef>
+          <a:effectRef idx="0">
+            <a:schemeClr val="accent1"/>
+          </a:effectRef>
+          <a:fontRef idx="minor">
+            <a:schemeClr val="tx1"/>
+          </a:fontRef>
+        </p:style>
+      </p:cxnSp>
+      <p:cxnSp>
+        <p:nvCxnSpPr>
+          <p:cNvPr id="101" name="Straight Connector 100">
+            <a:extLst>
+              <a:ext uri="{FF2B5EF4-FFF2-40B4-BE49-F238E27FC236}">
+                <a16:creationId xmlns:a16="http://schemas.microsoft.com/office/drawing/2014/main" id="{911F41F7-9736-8A5A-DA50-25C9E5577200}"/>
+              </a:ext>
+            </a:extLst>
+          </p:cNvPr>
+          <p:cNvCxnSpPr>
+            <a:cxnSpLocks/>
+          </p:cNvCxnSpPr>
+          <p:nvPr/>
+        </p:nvCxnSpPr>
+        <p:spPr>
+          <a:xfrm flipV="1">
+            <a:off x="5628945" y="1842291"/>
+            <a:ext cx="0" cy="941832"/>
+          </a:xfrm>
+          <a:prstGeom prst="line">
+            <a:avLst/>
+          </a:prstGeom>
+          <a:ln w="19050">
+            <a:solidFill>
+              <a:schemeClr val="tx1"/>
+            </a:solidFill>
+          </a:ln>
+        </p:spPr>
+        <p:style>
+          <a:lnRef idx="1">
+            <a:schemeClr val="accent1"/>
+          </a:lnRef>
+          <a:fillRef idx="0">
+            <a:schemeClr val="accent1"/>
+          </a:fillRef>
+          <a:effectRef idx="0">
+            <a:schemeClr val="accent1"/>
+          </a:effectRef>
+          <a:fontRef idx="minor">
+            <a:schemeClr val="tx1"/>
+          </a:fontRef>
+        </p:style>
+      </p:cxnSp>
+      <p:cxnSp>
+        <p:nvCxnSpPr>
+          <p:cNvPr id="102" name="Straight Connector 101">
+            <a:extLst>
+              <a:ext uri="{FF2B5EF4-FFF2-40B4-BE49-F238E27FC236}">
+                <a16:creationId xmlns:a16="http://schemas.microsoft.com/office/drawing/2014/main" id="{AAF349B3-03A9-37FC-D49C-ADE61AB71E2F}"/>
+              </a:ext>
+            </a:extLst>
+          </p:cNvPr>
+          <p:cNvCxnSpPr>
+            <a:cxnSpLocks/>
+          </p:cNvCxnSpPr>
+          <p:nvPr/>
+        </p:nvCxnSpPr>
+        <p:spPr>
+          <a:xfrm>
+            <a:off x="5160167" y="3124228"/>
+            <a:ext cx="466344" cy="0"/>
+          </a:xfrm>
+          <a:prstGeom prst="line">
+            <a:avLst/>
+          </a:prstGeom>
+          <a:ln w="19050">
+            <a:solidFill>
+              <a:schemeClr val="tx1"/>
+            </a:solidFill>
+          </a:ln>
+        </p:spPr>
+        <p:style>
+          <a:lnRef idx="1">
+            <a:schemeClr val="accent1"/>
+          </a:lnRef>
+          <a:fillRef idx="0">
+            <a:schemeClr val="accent1"/>
+          </a:fillRef>
+          <a:effectRef idx="0">
+            <a:schemeClr val="accent1"/>
+          </a:effectRef>
+          <a:fontRef idx="minor">
+            <a:schemeClr val="tx1"/>
+          </a:fontRef>
+        </p:style>
+      </p:cxnSp>
+      <p:cxnSp>
+        <p:nvCxnSpPr>
+          <p:cNvPr id="104" name="Straight Connector 103">
+            <a:extLst>
+              <a:ext uri="{FF2B5EF4-FFF2-40B4-BE49-F238E27FC236}">
+                <a16:creationId xmlns:a16="http://schemas.microsoft.com/office/drawing/2014/main" id="{FBF8B7A9-54E1-1537-FE67-92A188EE7DA6}"/>
+              </a:ext>
+            </a:extLst>
+          </p:cNvPr>
+          <p:cNvCxnSpPr>
+            <a:cxnSpLocks/>
+          </p:cNvCxnSpPr>
+          <p:nvPr/>
+        </p:nvCxnSpPr>
+        <p:spPr>
+          <a:xfrm>
+            <a:off x="5156165" y="2776533"/>
+            <a:ext cx="466344" cy="0"/>
+          </a:xfrm>
+          <a:prstGeom prst="line">
+            <a:avLst/>
+          </a:prstGeom>
+          <a:ln w="19050">
+            <a:solidFill>
+              <a:schemeClr val="tx1"/>
+            </a:solidFill>
+          </a:ln>
+        </p:spPr>
+        <p:style>
+          <a:lnRef idx="1">
+            <a:schemeClr val="accent1"/>
+          </a:lnRef>
+          <a:fillRef idx="0">
+            <a:schemeClr val="accent1"/>
+          </a:fillRef>
+          <a:effectRef idx="0">
+            <a:schemeClr val="accent1"/>
+          </a:effectRef>
+          <a:fontRef idx="minor">
+            <a:schemeClr val="tx1"/>
+          </a:fontRef>
+        </p:style>
+      </p:cxnSp>
+      <p:cxnSp>
+        <p:nvCxnSpPr>
+          <p:cNvPr id="108" name="Straight Connector 107">
+            <a:extLst>
+              <a:ext uri="{FF2B5EF4-FFF2-40B4-BE49-F238E27FC236}">
+                <a16:creationId xmlns:a16="http://schemas.microsoft.com/office/drawing/2014/main" id="{A2DD1C17-17B8-5110-1393-AFA4E4231B24}"/>
+              </a:ext>
+            </a:extLst>
+          </p:cNvPr>
+          <p:cNvCxnSpPr>
+            <a:cxnSpLocks/>
+          </p:cNvCxnSpPr>
+          <p:nvPr/>
+        </p:nvCxnSpPr>
+        <p:spPr>
+          <a:xfrm>
+            <a:off x="5620911" y="1838835"/>
+            <a:ext cx="91440" cy="0"/>
+          </a:xfrm>
+          <a:prstGeom prst="line">
+            <a:avLst/>
+          </a:prstGeom>
+          <a:ln w="19050">
+            <a:solidFill>
+              <a:schemeClr val="tx1"/>
+            </a:solidFill>
+          </a:ln>
+        </p:spPr>
+        <p:style>
+          <a:lnRef idx="1">
+            <a:schemeClr val="accent1"/>
+          </a:lnRef>
+          <a:fillRef idx="0">
+            <a:schemeClr val="accent1"/>
+          </a:fillRef>
+          <a:effectRef idx="0">
+            <a:schemeClr val="accent1"/>
+          </a:effectRef>
+          <a:fontRef idx="minor">
+            <a:schemeClr val="tx1"/>
+          </a:fontRef>
+        </p:style>
+      </p:cxnSp>
+      <p:sp>
+        <p:nvSpPr>
+          <p:cNvPr id="109" name="TextBox 108">
+            <a:extLst>
+              <a:ext uri="{FF2B5EF4-FFF2-40B4-BE49-F238E27FC236}">
+                <a16:creationId xmlns:a16="http://schemas.microsoft.com/office/drawing/2014/main" id="{BF624F36-986E-614B-1B22-71CF45DD8D08}"/>
+              </a:ext>
+            </a:extLst>
+          </p:cNvPr>
+          <p:cNvSpPr txBox="1"/>
+          <p:nvPr/>
+        </p:nvSpPr>
+        <p:spPr>
+          <a:xfrm>
+            <a:off x="2496655" y="5343964"/>
+            <a:ext cx="183562" cy="246221"/>
+          </a:xfrm>
+          <a:prstGeom prst="rect">
+            <a:avLst/>
+          </a:prstGeom>
+          <a:noFill/>
+        </p:spPr>
+        <p:txBody>
+          <a:bodyPr wrap="square" rtlCol="0">
+            <a:spAutoFit/>
+          </a:bodyPr>
+          <a:lstStyle/>
+          <a:p>
+            <a:pPr algn="ctr"/>
+            <a:r>
+              <a:rPr lang="en-GB" sz="1000" dirty="0"/>
+              <a:t>N</a:t>
+            </a:r>
+            <a:endParaRPr lang="en-US" sz="1000" dirty="0"/>
+          </a:p>
+        </p:txBody>
+      </p:sp>
+      <p:sp>
+        <p:nvSpPr>
+          <p:cNvPr id="110" name="TextBox 109">
+            <a:extLst>
+              <a:ext uri="{FF2B5EF4-FFF2-40B4-BE49-F238E27FC236}">
+                <a16:creationId xmlns:a16="http://schemas.microsoft.com/office/drawing/2014/main" id="{3C6615CD-2E5B-1B4C-1A88-936859E086DE}"/>
+              </a:ext>
+            </a:extLst>
+          </p:cNvPr>
+          <p:cNvSpPr txBox="1"/>
+          <p:nvPr/>
+        </p:nvSpPr>
+        <p:spPr>
+          <a:xfrm>
+            <a:off x="3807248" y="5343964"/>
+            <a:ext cx="183562" cy="246221"/>
+          </a:xfrm>
+          <a:prstGeom prst="rect">
+            <a:avLst/>
+          </a:prstGeom>
+          <a:noFill/>
+        </p:spPr>
+        <p:txBody>
+          <a:bodyPr wrap="square" rtlCol="0">
+            <a:spAutoFit/>
+          </a:bodyPr>
+          <a:lstStyle/>
+          <a:p>
+            <a:pPr algn="ctr"/>
+            <a:r>
+              <a:rPr lang="en-GB" sz="1000" dirty="0"/>
+              <a:t>Y</a:t>
+            </a:r>
+            <a:endParaRPr lang="en-US" sz="1000" dirty="0"/>
+          </a:p>
+        </p:txBody>
+      </p:sp>
+      <p:sp>
+        <p:nvSpPr>
+          <p:cNvPr id="111" name="TextBox 110">
+            <a:extLst>
+              <a:ext uri="{FF2B5EF4-FFF2-40B4-BE49-F238E27FC236}">
+                <a16:creationId xmlns:a16="http://schemas.microsoft.com/office/drawing/2014/main" id="{68292C77-800E-D5DD-B736-909D02C87583}"/>
+              </a:ext>
+            </a:extLst>
+          </p:cNvPr>
+          <p:cNvSpPr txBox="1"/>
+          <p:nvPr/>
+        </p:nvSpPr>
+        <p:spPr>
+          <a:xfrm>
+            <a:off x="6100787" y="2020123"/>
+            <a:ext cx="183562" cy="246221"/>
+          </a:xfrm>
+          <a:prstGeom prst="rect">
+            <a:avLst/>
+          </a:prstGeom>
+          <a:noFill/>
+        </p:spPr>
+        <p:txBody>
+          <a:bodyPr wrap="square" rtlCol="0">
+            <a:spAutoFit/>
+          </a:bodyPr>
+          <a:lstStyle/>
+          <a:p>
+            <a:pPr algn="ctr"/>
+            <a:r>
+              <a:rPr lang="en-GB" sz="1000" dirty="0"/>
+              <a:t>Y</a:t>
+            </a:r>
+            <a:endParaRPr lang="en-US" sz="1000" dirty="0"/>
+          </a:p>
+        </p:txBody>
+      </p:sp>
+      <p:sp>
+        <p:nvSpPr>
+          <p:cNvPr id="112" name="TextBox 111">
+            <a:extLst>
+              <a:ext uri="{FF2B5EF4-FFF2-40B4-BE49-F238E27FC236}">
+                <a16:creationId xmlns:a16="http://schemas.microsoft.com/office/drawing/2014/main" id="{D1377481-A997-8B23-E4D3-0F32DC0AFF84}"/>
+              </a:ext>
+            </a:extLst>
+          </p:cNvPr>
+          <p:cNvSpPr txBox="1"/>
+          <p:nvPr/>
+        </p:nvSpPr>
+        <p:spPr>
+          <a:xfrm>
+            <a:off x="5563165" y="1645072"/>
+            <a:ext cx="183562" cy="246221"/>
+          </a:xfrm>
+          <a:prstGeom prst="rect">
+            <a:avLst/>
+          </a:prstGeom>
+          <a:noFill/>
+        </p:spPr>
+        <p:txBody>
+          <a:bodyPr wrap="square" rtlCol="0">
+            <a:spAutoFit/>
+          </a:bodyPr>
+          <a:lstStyle/>
+          <a:p>
+            <a:pPr algn="ctr"/>
+            <a:r>
+              <a:rPr lang="en-GB" sz="1000" dirty="0"/>
+              <a:t>N</a:t>
+            </a:r>
+            <a:endParaRPr lang="en-US" sz="1000" dirty="0"/>
+          </a:p>
+        </p:txBody>
+      </p:sp>
+      <p:sp>
+        <p:nvSpPr>
+          <p:cNvPr id="113" name="TextBox 112">
+            <a:extLst>
+              <a:ext uri="{FF2B5EF4-FFF2-40B4-BE49-F238E27FC236}">
+                <a16:creationId xmlns:a16="http://schemas.microsoft.com/office/drawing/2014/main" id="{C9AF8EA4-F40A-67C2-0255-CC21F30A1B97}"/>
+              </a:ext>
+            </a:extLst>
+          </p:cNvPr>
+          <p:cNvSpPr txBox="1"/>
+          <p:nvPr/>
+        </p:nvSpPr>
+        <p:spPr>
+          <a:xfrm>
+            <a:off x="6097612" y="3313149"/>
+            <a:ext cx="183562" cy="246221"/>
+          </a:xfrm>
+          <a:prstGeom prst="rect">
+            <a:avLst/>
+          </a:prstGeom>
+          <a:noFill/>
+        </p:spPr>
+        <p:txBody>
+          <a:bodyPr wrap="square" rtlCol="0">
+            <a:spAutoFit/>
+          </a:bodyPr>
+          <a:lstStyle/>
+          <a:p>
+            <a:pPr algn="ctr"/>
+            <a:r>
+              <a:rPr lang="en-GB" sz="1000" dirty="0"/>
+              <a:t>N</a:t>
+            </a:r>
+            <a:endParaRPr lang="en-US" sz="1000" dirty="0"/>
+          </a:p>
+        </p:txBody>
+      </p:sp>
+      <p:sp>
+        <p:nvSpPr>
+          <p:cNvPr id="114" name="TextBox 113">
+            <a:extLst>
+              <a:ext uri="{FF2B5EF4-FFF2-40B4-BE49-F238E27FC236}">
+                <a16:creationId xmlns:a16="http://schemas.microsoft.com/office/drawing/2014/main" id="{71B4EB98-6EEA-1DCD-765D-7F67E98B0E00}"/>
+              </a:ext>
+            </a:extLst>
+          </p:cNvPr>
+          <p:cNvSpPr txBox="1"/>
+          <p:nvPr/>
+        </p:nvSpPr>
+        <p:spPr>
+          <a:xfrm>
+            <a:off x="5567727" y="2869350"/>
+            <a:ext cx="183562" cy="246221"/>
+          </a:xfrm>
+          <a:prstGeom prst="rect">
+            <a:avLst/>
+          </a:prstGeom>
+          <a:noFill/>
+        </p:spPr>
+        <p:txBody>
+          <a:bodyPr wrap="square" rtlCol="0">
+            <a:spAutoFit/>
+          </a:bodyPr>
+          <a:lstStyle/>
+          <a:p>
+            <a:pPr algn="ctr"/>
+            <a:r>
+              <a:rPr lang="en-GB" sz="1000" dirty="0"/>
+              <a:t>Y</a:t>
+            </a:r>
+            <a:endParaRPr lang="en-US" sz="1000" dirty="0"/>
+          </a:p>
+        </p:txBody>
+      </p:sp>
+      <p:sp>
+        <p:nvSpPr>
+          <p:cNvPr id="115" name="TextBox 114">
+            <a:extLst>
+              <a:ext uri="{FF2B5EF4-FFF2-40B4-BE49-F238E27FC236}">
+                <a16:creationId xmlns:a16="http://schemas.microsoft.com/office/drawing/2014/main" id="{5C87747C-B7C5-B329-7BDF-2CB315508A51}"/>
+              </a:ext>
+            </a:extLst>
+          </p:cNvPr>
+          <p:cNvSpPr txBox="1"/>
+          <p:nvPr/>
+        </p:nvSpPr>
+        <p:spPr>
+          <a:xfrm>
+            <a:off x="5564552" y="4200996"/>
+            <a:ext cx="183562" cy="246221"/>
+          </a:xfrm>
+          <a:prstGeom prst="rect">
+            <a:avLst/>
+          </a:prstGeom>
+          <a:noFill/>
+        </p:spPr>
+        <p:txBody>
+          <a:bodyPr wrap="square" rtlCol="0">
+            <a:spAutoFit/>
+          </a:bodyPr>
+          <a:lstStyle/>
+          <a:p>
+            <a:pPr algn="ctr"/>
+            <a:r>
+              <a:rPr lang="en-GB" sz="1000" dirty="0"/>
+              <a:t>N</a:t>
+            </a:r>
+            <a:endParaRPr lang="en-US" sz="1000" dirty="0"/>
+          </a:p>
+        </p:txBody>
+      </p:sp>
+      <p:cxnSp>
+        <p:nvCxnSpPr>
+          <p:cNvPr id="116" name="Straight Connector 115">
+            <a:extLst>
+              <a:ext uri="{FF2B5EF4-FFF2-40B4-BE49-F238E27FC236}">
+                <a16:creationId xmlns:a16="http://schemas.microsoft.com/office/drawing/2014/main" id="{DDF5134B-B0F8-43E4-095F-696E9CD54B80}"/>
+              </a:ext>
+            </a:extLst>
+          </p:cNvPr>
+          <p:cNvCxnSpPr>
+            <a:cxnSpLocks/>
+          </p:cNvCxnSpPr>
+          <p:nvPr/>
+        </p:nvCxnSpPr>
+        <p:spPr>
+          <a:xfrm>
+            <a:off x="5924550" y="4655009"/>
+            <a:ext cx="0" cy="227146"/>
+          </a:xfrm>
+          <a:prstGeom prst="line">
+            <a:avLst/>
+          </a:prstGeom>
+          <a:ln w="19050">
+            <a:solidFill>
+              <a:schemeClr val="tx1"/>
+            </a:solidFill>
+          </a:ln>
+        </p:spPr>
+        <p:style>
+          <a:lnRef idx="1">
+            <a:schemeClr val="accent1"/>
+          </a:lnRef>
+          <a:fillRef idx="0">
+            <a:schemeClr val="accent1"/>
+          </a:fillRef>
+          <a:effectRef idx="0">
+            <a:schemeClr val="accent1"/>
+          </a:effectRef>
+          <a:fontRef idx="minor">
+            <a:schemeClr val="tx1"/>
+          </a:fontRef>
+        </p:style>
+      </p:cxnSp>
+      <p:cxnSp>
+        <p:nvCxnSpPr>
+          <p:cNvPr id="118" name="Straight Connector 117">
+            <a:extLst>
+              <a:ext uri="{FF2B5EF4-FFF2-40B4-BE49-F238E27FC236}">
+                <a16:creationId xmlns:a16="http://schemas.microsoft.com/office/drawing/2014/main" id="{3285D171-FE37-5C47-D62E-5EBC99ABFC93}"/>
+              </a:ext>
+            </a:extLst>
+          </p:cNvPr>
+          <p:cNvCxnSpPr>
+            <a:cxnSpLocks/>
+          </p:cNvCxnSpPr>
+          <p:nvPr/>
+        </p:nvCxnSpPr>
+        <p:spPr>
+          <a:xfrm>
+            <a:off x="5921082" y="4882155"/>
+            <a:ext cx="429768" cy="0"/>
+          </a:xfrm>
+          <a:prstGeom prst="line">
+            <a:avLst/>
+          </a:prstGeom>
+          <a:ln w="19050">
+            <a:solidFill>
+              <a:schemeClr val="tx1"/>
+            </a:solidFill>
+          </a:ln>
+        </p:spPr>
+        <p:style>
+          <a:lnRef idx="1">
+            <a:schemeClr val="accent1"/>
+          </a:lnRef>
+          <a:fillRef idx="0">
+            <a:schemeClr val="accent1"/>
+          </a:fillRef>
+          <a:effectRef idx="0">
+            <a:schemeClr val="accent1"/>
+          </a:effectRef>
+          <a:fontRef idx="minor">
+            <a:schemeClr val="tx1"/>
+          </a:fontRef>
+        </p:style>
+      </p:cxnSp>
+      <p:cxnSp>
+        <p:nvCxnSpPr>
+          <p:cNvPr id="119" name="Straight Connector 118">
+            <a:extLst>
+              <a:ext uri="{FF2B5EF4-FFF2-40B4-BE49-F238E27FC236}">
+                <a16:creationId xmlns:a16="http://schemas.microsoft.com/office/drawing/2014/main" id="{A908D855-0311-FCF7-4137-32D32C1E65FB}"/>
+              </a:ext>
+            </a:extLst>
+          </p:cNvPr>
+          <p:cNvCxnSpPr>
+            <a:cxnSpLocks/>
+          </p:cNvCxnSpPr>
+          <p:nvPr/>
+        </p:nvCxnSpPr>
+        <p:spPr>
+          <a:xfrm>
+            <a:off x="6337300" y="4655009"/>
+            <a:ext cx="0" cy="227146"/>
+          </a:xfrm>
+          <a:prstGeom prst="line">
+            <a:avLst/>
+          </a:prstGeom>
+          <a:ln w="19050">
+            <a:solidFill>
+              <a:schemeClr val="tx1"/>
+            </a:solidFill>
+          </a:ln>
+        </p:spPr>
+        <p:style>
+          <a:lnRef idx="1">
+            <a:schemeClr val="accent1"/>
+          </a:lnRef>
+          <a:fillRef idx="0">
+            <a:schemeClr val="accent1"/>
+          </a:fillRef>
+          <a:effectRef idx="0">
+            <a:schemeClr val="accent1"/>
+          </a:effectRef>
+          <a:fontRef idx="minor">
+            <a:schemeClr val="tx1"/>
+          </a:fontRef>
+        </p:style>
+      </p:cxnSp>
+      <p:sp>
+        <p:nvSpPr>
+          <p:cNvPr id="121" name="TextBox 120">
+            <a:extLst>
+              <a:ext uri="{FF2B5EF4-FFF2-40B4-BE49-F238E27FC236}">
+                <a16:creationId xmlns:a16="http://schemas.microsoft.com/office/drawing/2014/main" id="{42324338-402F-7834-F014-3856CBB1C2B7}"/>
+              </a:ext>
+            </a:extLst>
+          </p:cNvPr>
+          <p:cNvSpPr txBox="1"/>
+          <p:nvPr/>
+        </p:nvSpPr>
+        <p:spPr>
+          <a:xfrm>
+            <a:off x="5779016" y="4597792"/>
+            <a:ext cx="183562" cy="246221"/>
+          </a:xfrm>
+          <a:prstGeom prst="rect">
+            <a:avLst/>
+          </a:prstGeom>
+          <a:noFill/>
+        </p:spPr>
+        <p:txBody>
+          <a:bodyPr wrap="square" rtlCol="0">
+            <a:spAutoFit/>
+          </a:bodyPr>
+          <a:lstStyle/>
+          <a:p>
+            <a:pPr algn="ctr"/>
+            <a:r>
+              <a:rPr lang="en-GB" sz="1000" dirty="0"/>
+              <a:t>Y</a:t>
+            </a:r>
+            <a:endParaRPr lang="en-US" sz="1000" dirty="0"/>
+          </a:p>
+        </p:txBody>
+      </p:sp>
+      <p:cxnSp>
+        <p:nvCxnSpPr>
+          <p:cNvPr id="122" name="Straight Connector 121">
+            <a:extLst>
+              <a:ext uri="{FF2B5EF4-FFF2-40B4-BE49-F238E27FC236}">
+                <a16:creationId xmlns:a16="http://schemas.microsoft.com/office/drawing/2014/main" id="{16BCE8EB-0F37-C632-AD8A-4EF145207278}"/>
+              </a:ext>
+            </a:extLst>
+          </p:cNvPr>
+          <p:cNvCxnSpPr>
+            <a:cxnSpLocks/>
+          </p:cNvCxnSpPr>
+          <p:nvPr/>
+        </p:nvCxnSpPr>
+        <p:spPr>
+          <a:xfrm>
+            <a:off x="5156165" y="4255324"/>
+            <a:ext cx="201168" cy="0"/>
+          </a:xfrm>
+          <a:prstGeom prst="line">
+            <a:avLst/>
+          </a:prstGeom>
+          <a:ln w="19050">
+            <a:solidFill>
+              <a:schemeClr val="tx1"/>
+            </a:solidFill>
+          </a:ln>
+        </p:spPr>
+        <p:style>
+          <a:lnRef idx="1">
+            <a:schemeClr val="accent1"/>
+          </a:lnRef>
+          <a:fillRef idx="0">
+            <a:schemeClr val="accent1"/>
+          </a:fillRef>
+          <a:effectRef idx="0">
+            <a:schemeClr val="accent1"/>
+          </a:effectRef>
+          <a:fontRef idx="minor">
+            <a:schemeClr val="tx1"/>
+          </a:fontRef>
+        </p:style>
+      </p:cxnSp>
+      <p:cxnSp>
+        <p:nvCxnSpPr>
+          <p:cNvPr id="123" name="Straight Connector 122">
+            <a:extLst>
+              <a:ext uri="{FF2B5EF4-FFF2-40B4-BE49-F238E27FC236}">
+                <a16:creationId xmlns:a16="http://schemas.microsoft.com/office/drawing/2014/main" id="{7D3DBB7D-1E50-263E-0C3D-1582D0C5FD7E}"/>
+              </a:ext>
+            </a:extLst>
+          </p:cNvPr>
+          <p:cNvCxnSpPr>
+            <a:cxnSpLocks/>
+          </p:cNvCxnSpPr>
+          <p:nvPr/>
+        </p:nvCxnSpPr>
+        <p:spPr>
+          <a:xfrm flipV="1">
+            <a:off x="5354475" y="1656650"/>
+            <a:ext cx="0" cy="2606040"/>
+          </a:xfrm>
+          <a:prstGeom prst="line">
+            <a:avLst/>
+          </a:prstGeom>
+          <a:ln w="19050">
+            <a:solidFill>
+              <a:schemeClr val="tx1"/>
+            </a:solidFill>
+          </a:ln>
+        </p:spPr>
+        <p:style>
+          <a:lnRef idx="1">
+            <a:schemeClr val="accent1"/>
+          </a:lnRef>
+          <a:fillRef idx="0">
+            <a:schemeClr val="accent1"/>
+          </a:fillRef>
+          <a:effectRef idx="0">
+            <a:schemeClr val="accent1"/>
+          </a:effectRef>
+          <a:fontRef idx="minor">
+            <a:schemeClr val="tx1"/>
+          </a:fontRef>
+        </p:style>
+      </p:cxnSp>
+      <p:cxnSp>
+        <p:nvCxnSpPr>
+          <p:cNvPr id="124" name="Straight Connector 123">
+            <a:extLst>
+              <a:ext uri="{FF2B5EF4-FFF2-40B4-BE49-F238E27FC236}">
+                <a16:creationId xmlns:a16="http://schemas.microsoft.com/office/drawing/2014/main" id="{3F33D05B-2561-7704-0D1F-7A0665C2E202}"/>
+              </a:ext>
+            </a:extLst>
+          </p:cNvPr>
+          <p:cNvCxnSpPr>
+            <a:cxnSpLocks/>
+          </p:cNvCxnSpPr>
+          <p:nvPr/>
+        </p:nvCxnSpPr>
+        <p:spPr>
+          <a:xfrm>
+            <a:off x="5163391" y="1665798"/>
+            <a:ext cx="182880" cy="0"/>
+          </a:xfrm>
+          <a:prstGeom prst="line">
+            <a:avLst/>
+          </a:prstGeom>
+          <a:ln w="19050">
+            <a:solidFill>
+              <a:schemeClr val="tx1"/>
+            </a:solidFill>
+          </a:ln>
+        </p:spPr>
+        <p:style>
+          <a:lnRef idx="1">
+            <a:schemeClr val="accent1"/>
+          </a:lnRef>
+          <a:fillRef idx="0">
+            <a:schemeClr val="accent1"/>
+          </a:fillRef>
+          <a:effectRef idx="0">
+            <a:schemeClr val="accent1"/>
+          </a:effectRef>
+          <a:fontRef idx="minor">
+            <a:schemeClr val="tx1"/>
+          </a:fontRef>
+        </p:style>
+      </p:cxnSp>
+      <p:sp>
+        <p:nvSpPr>
+          <p:cNvPr id="126" name="TextBox 125">
+            <a:extLst>
+              <a:ext uri="{FF2B5EF4-FFF2-40B4-BE49-F238E27FC236}">
+                <a16:creationId xmlns:a16="http://schemas.microsoft.com/office/drawing/2014/main" id="{C69FC230-4749-6C87-859E-E8EB427B58F3}"/>
+              </a:ext>
+            </a:extLst>
+          </p:cNvPr>
+          <p:cNvSpPr txBox="1"/>
+          <p:nvPr/>
+        </p:nvSpPr>
+        <p:spPr>
+          <a:xfrm>
+            <a:off x="4724646" y="3642207"/>
+            <a:ext cx="183562" cy="246221"/>
+          </a:xfrm>
+          <a:prstGeom prst="rect">
+            <a:avLst/>
+          </a:prstGeom>
+          <a:noFill/>
+        </p:spPr>
+        <p:txBody>
+          <a:bodyPr wrap="square" rtlCol="0">
+            <a:spAutoFit/>
+          </a:bodyPr>
+          <a:lstStyle/>
+          <a:p>
+            <a:pPr algn="ctr"/>
+            <a:r>
+              <a:rPr lang="en-GB" sz="1000" dirty="0"/>
+              <a:t>N</a:t>
+            </a:r>
+            <a:endParaRPr lang="en-US" sz="1000" dirty="0"/>
+          </a:p>
+        </p:txBody>
+      </p:sp>
+      <p:sp>
+        <p:nvSpPr>
+          <p:cNvPr id="128" name="TextBox 127">
+            <a:extLst>
+              <a:ext uri="{FF2B5EF4-FFF2-40B4-BE49-F238E27FC236}">
+                <a16:creationId xmlns:a16="http://schemas.microsoft.com/office/drawing/2014/main" id="{EC7E0468-5561-FE20-C6FF-4B288486EE1B}"/>
+              </a:ext>
+            </a:extLst>
+          </p:cNvPr>
+          <p:cNvSpPr txBox="1"/>
+          <p:nvPr/>
+        </p:nvSpPr>
+        <p:spPr>
+          <a:xfrm>
+            <a:off x="3411220" y="2025420"/>
+            <a:ext cx="183562" cy="246221"/>
+          </a:xfrm>
+          <a:prstGeom prst="rect">
+            <a:avLst/>
+          </a:prstGeom>
+          <a:noFill/>
+        </p:spPr>
+        <p:txBody>
+          <a:bodyPr wrap="square" rtlCol="0">
+            <a:spAutoFit/>
+          </a:bodyPr>
+          <a:lstStyle/>
+          <a:p>
+            <a:pPr algn="ctr"/>
+            <a:r>
+              <a:rPr lang="en-GB" sz="1000" dirty="0"/>
+              <a:t>N</a:t>
+            </a:r>
+            <a:endParaRPr lang="en-US" sz="1000" dirty="0"/>
+          </a:p>
+        </p:txBody>
+      </p:sp>
+      <p:sp>
+        <p:nvSpPr>
+          <p:cNvPr id="129" name="TextBox 128">
+            <a:extLst>
+              <a:ext uri="{FF2B5EF4-FFF2-40B4-BE49-F238E27FC236}">
+                <a16:creationId xmlns:a16="http://schemas.microsoft.com/office/drawing/2014/main" id="{F3354D87-B649-4380-878D-346947A750C6}"/>
+              </a:ext>
+            </a:extLst>
+          </p:cNvPr>
+          <p:cNvSpPr txBox="1"/>
+          <p:nvPr/>
+        </p:nvSpPr>
+        <p:spPr>
+          <a:xfrm>
+            <a:off x="2867562" y="1625746"/>
+            <a:ext cx="183562" cy="246221"/>
+          </a:xfrm>
+          <a:prstGeom prst="rect">
+            <a:avLst/>
+          </a:prstGeom>
+          <a:noFill/>
+        </p:spPr>
+        <p:txBody>
+          <a:bodyPr wrap="square" rtlCol="0">
+            <a:spAutoFit/>
+          </a:bodyPr>
+          <a:lstStyle/>
+          <a:p>
+            <a:pPr algn="ctr"/>
+            <a:r>
+              <a:rPr lang="en-GB" sz="1000" dirty="0"/>
+              <a:t>Y</a:t>
+            </a:r>
+            <a:endParaRPr lang="en-US" sz="1000" dirty="0"/>
+          </a:p>
+        </p:txBody>
+      </p:sp>
+      <p:sp>
+        <p:nvSpPr>
+          <p:cNvPr id="130" name="TextBox 129">
+            <a:extLst>
+              <a:ext uri="{FF2B5EF4-FFF2-40B4-BE49-F238E27FC236}">
+                <a16:creationId xmlns:a16="http://schemas.microsoft.com/office/drawing/2014/main" id="{1DBEB183-B76C-8AF9-BF76-BEBA4A32D97A}"/>
+              </a:ext>
+            </a:extLst>
+          </p:cNvPr>
+          <p:cNvSpPr txBox="1"/>
+          <p:nvPr/>
+        </p:nvSpPr>
+        <p:spPr>
+          <a:xfrm>
+            <a:off x="3404870" y="4930285"/>
+            <a:ext cx="183562" cy="246221"/>
+          </a:xfrm>
+          <a:prstGeom prst="rect">
+            <a:avLst/>
+          </a:prstGeom>
+          <a:noFill/>
+        </p:spPr>
+        <p:txBody>
+          <a:bodyPr wrap="square" rtlCol="0">
+            <a:spAutoFit/>
+          </a:bodyPr>
+          <a:lstStyle/>
+          <a:p>
+            <a:pPr algn="ctr"/>
+            <a:r>
+              <a:rPr lang="en-GB" sz="1000" dirty="0"/>
+              <a:t>N</a:t>
+            </a:r>
+            <a:endParaRPr lang="en-US" sz="1000" dirty="0"/>
+          </a:p>
+        </p:txBody>
+      </p:sp>
+      <p:sp>
+        <p:nvSpPr>
+          <p:cNvPr id="135" name="Isosceles Triangle 134">
+            <a:extLst>
+              <a:ext uri="{FF2B5EF4-FFF2-40B4-BE49-F238E27FC236}">
+                <a16:creationId xmlns:a16="http://schemas.microsoft.com/office/drawing/2014/main" id="{45734C76-7689-2FC8-238E-279B587A5127}"/>
+              </a:ext>
+            </a:extLst>
+          </p:cNvPr>
+          <p:cNvSpPr/>
+          <p:nvPr/>
+        </p:nvSpPr>
+        <p:spPr>
+          <a:xfrm rot="5400000">
+            <a:off x="4219015" y="3081433"/>
+            <a:ext cx="137160" cy="91440"/>
+          </a:xfrm>
+          <a:prstGeom prst="triangle">
+            <a:avLst/>
+          </a:prstGeom>
+          <a:solidFill>
+            <a:schemeClr val="tx1"/>
+          </a:solidFill>
+          <a:ln>
+            <a:solidFill>
+              <a:schemeClr val="tx1"/>
+            </a:solidFill>
+          </a:ln>
+        </p:spPr>
+        <p:style>
+          <a:lnRef idx="2">
+            <a:schemeClr val="accent1">
+              <a:shade val="15000"/>
+            </a:schemeClr>
+          </a:lnRef>
+          <a:fillRef idx="1">
+            <a:schemeClr val="accent1"/>
+          </a:fillRef>
+          <a:effectRef idx="0">
+            <a:schemeClr val="accent1"/>
+          </a:effectRef>
+          <a:fontRef idx="minor">
+            <a:schemeClr val="lt1"/>
+          </a:fontRef>
+        </p:style>
+        <p:txBody>
+          <a:bodyPr rtlCol="0" anchor="ctr"/>
+          <a:lstStyle/>
+          <a:p>
+            <a:pPr algn="ctr"/>
+            <a:endParaRPr lang="en-US"/>
+          </a:p>
+        </p:txBody>
+      </p:sp>
+      <p:cxnSp>
+        <p:nvCxnSpPr>
+          <p:cNvPr id="136" name="Straight Connector 135">
+            <a:extLst>
+              <a:ext uri="{FF2B5EF4-FFF2-40B4-BE49-F238E27FC236}">
+                <a16:creationId xmlns:a16="http://schemas.microsoft.com/office/drawing/2014/main" id="{E0102043-DFD5-0091-B94D-5FF476334AA2}"/>
+              </a:ext>
+            </a:extLst>
+          </p:cNvPr>
+          <p:cNvCxnSpPr>
+            <a:cxnSpLocks/>
+          </p:cNvCxnSpPr>
+          <p:nvPr/>
+        </p:nvCxnSpPr>
+        <p:spPr>
+          <a:xfrm flipV="1">
+            <a:off x="2121219" y="4255292"/>
+            <a:ext cx="0" cy="877824"/>
+          </a:xfrm>
+          <a:prstGeom prst="line">
+            <a:avLst/>
+          </a:prstGeom>
+          <a:ln w="19050">
+            <a:solidFill>
+              <a:schemeClr val="tx1"/>
+            </a:solidFill>
+          </a:ln>
+        </p:spPr>
+        <p:style>
+          <a:lnRef idx="1">
+            <a:schemeClr val="accent1"/>
+          </a:lnRef>
+          <a:fillRef idx="0">
+            <a:schemeClr val="accent1"/>
+          </a:fillRef>
+          <a:effectRef idx="0">
+            <a:schemeClr val="accent1"/>
+          </a:effectRef>
+          <a:fontRef idx="minor">
+            <a:schemeClr val="tx1"/>
+          </a:fontRef>
+        </p:style>
+      </p:cxnSp>
+      <p:sp>
+        <p:nvSpPr>
+          <p:cNvPr id="137" name="TextBox 136">
+            <a:extLst>
+              <a:ext uri="{FF2B5EF4-FFF2-40B4-BE49-F238E27FC236}">
+                <a16:creationId xmlns:a16="http://schemas.microsoft.com/office/drawing/2014/main" id="{BA01C64D-B2DA-5F89-504D-68400C3EDFC8}"/>
+              </a:ext>
+            </a:extLst>
+          </p:cNvPr>
+          <p:cNvSpPr txBox="1"/>
+          <p:nvPr/>
+        </p:nvSpPr>
+        <p:spPr>
+          <a:xfrm>
+            <a:off x="2092347" y="4930285"/>
+            <a:ext cx="183562" cy="246221"/>
+          </a:xfrm>
+          <a:prstGeom prst="rect">
+            <a:avLst/>
+          </a:prstGeom>
+          <a:noFill/>
+        </p:spPr>
+        <p:txBody>
+          <a:bodyPr wrap="square" rtlCol="0">
+            <a:spAutoFit/>
+          </a:bodyPr>
+          <a:lstStyle/>
+          <a:p>
+            <a:pPr algn="ctr"/>
+            <a:r>
+              <a:rPr lang="en-GB" sz="1000" dirty="0"/>
+              <a:t>Y</a:t>
+            </a:r>
+            <a:endParaRPr lang="en-US" sz="1000" dirty="0"/>
+          </a:p>
+        </p:txBody>
+      </p:sp>
+      <p:cxnSp>
+        <p:nvCxnSpPr>
+          <p:cNvPr id="139" name="Straight Connector 138">
+            <a:extLst>
+              <a:ext uri="{FF2B5EF4-FFF2-40B4-BE49-F238E27FC236}">
+                <a16:creationId xmlns:a16="http://schemas.microsoft.com/office/drawing/2014/main" id="{E362A3CC-4F50-7DDE-69E9-0490E6FAD4DD}"/>
+              </a:ext>
+            </a:extLst>
+          </p:cNvPr>
+          <p:cNvCxnSpPr>
+            <a:cxnSpLocks/>
+          </p:cNvCxnSpPr>
+          <p:nvPr/>
+        </p:nvCxnSpPr>
+        <p:spPr>
+          <a:xfrm>
+            <a:off x="2111692" y="4250562"/>
+            <a:ext cx="1217832" cy="0"/>
+          </a:xfrm>
+          <a:prstGeom prst="line">
+            <a:avLst/>
+          </a:prstGeom>
+          <a:ln w="19050">
+            <a:solidFill>
+              <a:schemeClr val="tx1"/>
+            </a:solidFill>
+          </a:ln>
+        </p:spPr>
+        <p:style>
+          <a:lnRef idx="1">
+            <a:schemeClr val="accent1"/>
+          </a:lnRef>
+          <a:fillRef idx="0">
+            <a:schemeClr val="accent1"/>
+          </a:fillRef>
+          <a:effectRef idx="0">
+            <a:schemeClr val="accent1"/>
+          </a:effectRef>
+          <a:fontRef idx="minor">
+            <a:schemeClr val="tx1"/>
+          </a:fontRef>
+        </p:style>
+      </p:cxnSp>
+      <p:cxnSp>
+        <p:nvCxnSpPr>
+          <p:cNvPr id="142" name="Straight Connector 141">
+            <a:extLst>
+              <a:ext uri="{FF2B5EF4-FFF2-40B4-BE49-F238E27FC236}">
+                <a16:creationId xmlns:a16="http://schemas.microsoft.com/office/drawing/2014/main" id="{44AFE058-AF42-0D61-8F1D-13DC4F6FCF1E}"/>
+              </a:ext>
+            </a:extLst>
+          </p:cNvPr>
+          <p:cNvCxnSpPr>
+            <a:cxnSpLocks/>
+          </p:cNvCxnSpPr>
+          <p:nvPr/>
+        </p:nvCxnSpPr>
+        <p:spPr>
+          <a:xfrm flipV="1">
+            <a:off x="3330800" y="3134232"/>
+            <a:ext cx="0" cy="1124712"/>
+          </a:xfrm>
+          <a:prstGeom prst="line">
+            <a:avLst/>
+          </a:prstGeom>
+          <a:ln w="19050">
+            <a:solidFill>
+              <a:schemeClr val="tx1"/>
+            </a:solidFill>
+          </a:ln>
+        </p:spPr>
+        <p:style>
+          <a:lnRef idx="1">
+            <a:schemeClr val="accent1"/>
+          </a:lnRef>
+          <a:fillRef idx="0">
+            <a:schemeClr val="accent1"/>
+          </a:fillRef>
+          <a:effectRef idx="0">
+            <a:schemeClr val="accent1"/>
+          </a:effectRef>
+          <a:fontRef idx="minor">
+            <a:schemeClr val="tx1"/>
+          </a:fontRef>
+        </p:style>
+      </p:cxnSp>
+      <p:sp>
+        <p:nvSpPr>
+          <p:cNvPr id="144" name="TextBox 143">
+            <a:extLst>
+              <a:ext uri="{FF2B5EF4-FFF2-40B4-BE49-F238E27FC236}">
+                <a16:creationId xmlns:a16="http://schemas.microsoft.com/office/drawing/2014/main" id="{536B9100-5AC3-9272-2CC5-D22CCD39256A}"/>
+              </a:ext>
+            </a:extLst>
+          </p:cNvPr>
+          <p:cNvSpPr txBox="1"/>
+          <p:nvPr/>
+        </p:nvSpPr>
+        <p:spPr>
+          <a:xfrm>
+            <a:off x="5124810" y="4061893"/>
+            <a:ext cx="183562" cy="246221"/>
+          </a:xfrm>
+          <a:prstGeom prst="rect">
+            <a:avLst/>
+          </a:prstGeom>
+          <a:noFill/>
+        </p:spPr>
+        <p:txBody>
+          <a:bodyPr wrap="square" rtlCol="0">
+            <a:spAutoFit/>
+          </a:bodyPr>
+          <a:lstStyle/>
+          <a:p>
+            <a:pPr algn="ctr"/>
+            <a:r>
+              <a:rPr lang="en-GB" sz="1000" dirty="0"/>
+              <a:t>Y</a:t>
+            </a:r>
+            <a:endParaRPr lang="en-US" sz="1000" dirty="0"/>
+          </a:p>
+        </p:txBody>
+      </p:sp>
+      <p:sp>
+        <p:nvSpPr>
+          <p:cNvPr id="149" name="Right Bracket 148">
+            <a:extLst>
+              <a:ext uri="{FF2B5EF4-FFF2-40B4-BE49-F238E27FC236}">
+                <a16:creationId xmlns:a16="http://schemas.microsoft.com/office/drawing/2014/main" id="{AD163710-877B-294D-B8B6-8C83B44FC7E7}"/>
+              </a:ext>
+            </a:extLst>
+          </p:cNvPr>
+          <p:cNvSpPr/>
+          <p:nvPr/>
+        </p:nvSpPr>
+        <p:spPr>
+          <a:xfrm rot="5400000">
+            <a:off x="2655059" y="3882667"/>
+            <a:ext cx="228600" cy="4788059"/>
+          </a:xfrm>
+          <a:prstGeom prst="rightBracket">
+            <a:avLst>
+              <a:gd name="adj" fmla="val 0"/>
+            </a:avLst>
+          </a:prstGeom>
+          <a:ln w="19050">
+            <a:solidFill>
+              <a:schemeClr val="tx1"/>
+            </a:solidFill>
+          </a:ln>
+        </p:spPr>
+        <p:style>
+          <a:lnRef idx="1">
+            <a:schemeClr val="accent1"/>
+          </a:lnRef>
+          <a:fillRef idx="0">
+            <a:schemeClr val="accent1"/>
+          </a:fillRef>
+          <a:effectRef idx="0">
+            <a:schemeClr val="accent1"/>
+          </a:effectRef>
+          <a:fontRef idx="minor">
+            <a:schemeClr val="tx1"/>
+          </a:fontRef>
+        </p:style>
+        <p:txBody>
+          <a:bodyPr rtlCol="0" anchor="ctr"/>
+          <a:lstStyle/>
+          <a:p>
+            <a:pPr algn="ctr"/>
+            <a:endParaRPr lang="en-US"/>
+          </a:p>
+        </p:txBody>
+      </p:sp>
+      <p:sp>
+        <p:nvSpPr>
+          <p:cNvPr id="150" name="Right Bracket 149">
+            <a:extLst>
+              <a:ext uri="{FF2B5EF4-FFF2-40B4-BE49-F238E27FC236}">
+                <a16:creationId xmlns:a16="http://schemas.microsoft.com/office/drawing/2014/main" id="{EB9C2BCD-6115-90D5-4CBE-664560600FA4}"/>
+              </a:ext>
+            </a:extLst>
+          </p:cNvPr>
+          <p:cNvSpPr/>
+          <p:nvPr/>
+        </p:nvSpPr>
+        <p:spPr>
+          <a:xfrm rot="5400000">
+            <a:off x="6008823" y="5862017"/>
+            <a:ext cx="228600" cy="829673"/>
+          </a:xfrm>
+          <a:prstGeom prst="rightBracket">
+            <a:avLst>
+              <a:gd name="adj" fmla="val 0"/>
+            </a:avLst>
+          </a:prstGeom>
+          <a:ln w="19050">
+            <a:solidFill>
+              <a:schemeClr val="tx1"/>
+            </a:solidFill>
+          </a:ln>
+        </p:spPr>
+        <p:style>
+          <a:lnRef idx="1">
+            <a:schemeClr val="accent1"/>
+          </a:lnRef>
+          <a:fillRef idx="0">
+            <a:schemeClr val="accent1"/>
+          </a:fillRef>
+          <a:effectRef idx="0">
+            <a:schemeClr val="accent1"/>
+          </a:effectRef>
+          <a:fontRef idx="minor">
+            <a:schemeClr val="tx1"/>
+          </a:fontRef>
+        </p:style>
+        <p:txBody>
+          <a:bodyPr rtlCol="0" anchor="ctr"/>
+          <a:lstStyle/>
+          <a:p>
+            <a:pPr algn="ctr"/>
+            <a:endParaRPr lang="en-US"/>
+          </a:p>
+        </p:txBody>
+      </p:sp>
+      <p:sp>
+        <p:nvSpPr>
+          <p:cNvPr id="151" name="TextBox 150">
+            <a:extLst>
+              <a:ext uri="{FF2B5EF4-FFF2-40B4-BE49-F238E27FC236}">
+                <a16:creationId xmlns:a16="http://schemas.microsoft.com/office/drawing/2014/main" id="{234DCFF8-3AD0-830C-AE37-25B810B32D34}"/>
+              </a:ext>
+            </a:extLst>
+          </p:cNvPr>
+          <p:cNvSpPr txBox="1"/>
+          <p:nvPr/>
+        </p:nvSpPr>
+        <p:spPr>
+          <a:xfrm>
+            <a:off x="5675165" y="6138196"/>
+            <a:ext cx="895916" cy="276999"/>
+          </a:xfrm>
+          <a:prstGeom prst="rect">
+            <a:avLst/>
+          </a:prstGeom>
+          <a:noFill/>
+        </p:spPr>
+        <p:txBody>
+          <a:bodyPr wrap="square" rtlCol="0">
+            <a:spAutoFit/>
+          </a:bodyPr>
+          <a:lstStyle/>
+          <a:p>
+            <a:pPr algn="ctr"/>
+            <a:r>
+              <a:rPr lang="en-GB" sz="1200" i="1" dirty="0"/>
+              <a:t>Seed bank</a:t>
+            </a:r>
+            <a:endParaRPr lang="en-US" sz="1200" i="1" dirty="0"/>
+          </a:p>
+        </p:txBody>
+      </p:sp>
+      <p:sp>
+        <p:nvSpPr>
+          <p:cNvPr id="152" name="TextBox 151">
+            <a:extLst>
+              <a:ext uri="{FF2B5EF4-FFF2-40B4-BE49-F238E27FC236}">
+                <a16:creationId xmlns:a16="http://schemas.microsoft.com/office/drawing/2014/main" id="{46A5DBB1-EBD4-8B1C-56EC-5FBB7A7EFFC6}"/>
+              </a:ext>
+            </a:extLst>
+          </p:cNvPr>
+          <p:cNvSpPr txBox="1"/>
+          <p:nvPr/>
+        </p:nvSpPr>
+        <p:spPr>
+          <a:xfrm>
+            <a:off x="905022" y="6138196"/>
+            <a:ext cx="3778581" cy="276999"/>
+          </a:xfrm>
+          <a:prstGeom prst="rect">
+            <a:avLst/>
+          </a:prstGeom>
+          <a:noFill/>
+        </p:spPr>
+        <p:txBody>
+          <a:bodyPr wrap="square" rtlCol="0">
+            <a:spAutoFit/>
+          </a:bodyPr>
+          <a:lstStyle/>
+          <a:p>
+            <a:pPr algn="ctr"/>
+            <a:r>
+              <a:rPr lang="en-GB" sz="1200" i="1" dirty="0"/>
+              <a:t>Demography and dispersal</a:t>
+            </a:r>
+            <a:endParaRPr lang="en-US" sz="1200" i="1" dirty="0"/>
+          </a:p>
+        </p:txBody>
+      </p:sp>
+      <p:cxnSp>
+        <p:nvCxnSpPr>
+          <p:cNvPr id="154" name="Straight Connector 153">
+            <a:extLst>
+              <a:ext uri="{FF2B5EF4-FFF2-40B4-BE49-F238E27FC236}">
+                <a16:creationId xmlns:a16="http://schemas.microsoft.com/office/drawing/2014/main" id="{F3769726-B91D-2063-41AE-74DE5891214E}"/>
+              </a:ext>
+            </a:extLst>
+          </p:cNvPr>
+          <p:cNvCxnSpPr>
+            <a:cxnSpLocks/>
+          </p:cNvCxnSpPr>
+          <p:nvPr/>
+        </p:nvCxnSpPr>
+        <p:spPr>
+          <a:xfrm>
+            <a:off x="1199907" y="2782883"/>
+            <a:ext cx="3063240" cy="0"/>
+          </a:xfrm>
+          <a:prstGeom prst="line">
+            <a:avLst/>
+          </a:prstGeom>
+          <a:ln w="19050">
+            <a:solidFill>
+              <a:schemeClr val="tx1"/>
+            </a:solidFill>
+          </a:ln>
+        </p:spPr>
+        <p:style>
+          <a:lnRef idx="1">
+            <a:schemeClr val="accent1"/>
+          </a:lnRef>
+          <a:fillRef idx="0">
+            <a:schemeClr val="accent1"/>
+          </a:fillRef>
+          <a:effectRef idx="0">
+            <a:schemeClr val="accent1"/>
+          </a:effectRef>
+          <a:fontRef idx="minor">
+            <a:schemeClr val="tx1"/>
+          </a:fontRef>
+        </p:style>
+      </p:cxnSp>
+      <p:sp>
+        <p:nvSpPr>
+          <p:cNvPr id="155" name="TextBox 154">
+            <a:extLst>
+              <a:ext uri="{FF2B5EF4-FFF2-40B4-BE49-F238E27FC236}">
+                <a16:creationId xmlns:a16="http://schemas.microsoft.com/office/drawing/2014/main" id="{C437F2DA-1F03-D3F1-71D4-A9423D6E215B}"/>
+              </a:ext>
+            </a:extLst>
+          </p:cNvPr>
+          <p:cNvSpPr txBox="1"/>
+          <p:nvPr/>
+        </p:nvSpPr>
+        <p:spPr>
+          <a:xfrm>
+            <a:off x="1146919" y="2755796"/>
+            <a:ext cx="1135879" cy="246221"/>
+          </a:xfrm>
+          <a:prstGeom prst="rect">
+            <a:avLst/>
+          </a:prstGeom>
+          <a:noFill/>
+        </p:spPr>
+        <p:txBody>
+          <a:bodyPr wrap="square" rtlCol="0">
+            <a:spAutoFit/>
+          </a:bodyPr>
+          <a:lstStyle/>
+          <a:p>
+            <a:r>
+              <a:rPr lang="en-GB" sz="1000" dirty="0"/>
+              <a:t>All adults</a:t>
+            </a:r>
+            <a:endParaRPr lang="en-US" sz="1000" dirty="0"/>
+          </a:p>
+        </p:txBody>
+      </p:sp>
+      <p:sp>
+        <p:nvSpPr>
+          <p:cNvPr id="156" name="TextBox 155">
+            <a:extLst>
+              <a:ext uri="{FF2B5EF4-FFF2-40B4-BE49-F238E27FC236}">
+                <a16:creationId xmlns:a16="http://schemas.microsoft.com/office/drawing/2014/main" id="{D78ACCE1-DC0A-F55C-8088-861A367AF093}"/>
+              </a:ext>
+            </a:extLst>
+          </p:cNvPr>
+          <p:cNvSpPr txBox="1"/>
+          <p:nvPr/>
+        </p:nvSpPr>
+        <p:spPr>
+          <a:xfrm>
+            <a:off x="734617" y="3362999"/>
+            <a:ext cx="1135879" cy="328167"/>
+          </a:xfrm>
+          <a:prstGeom prst="rect">
+            <a:avLst/>
+          </a:prstGeom>
+          <a:noFill/>
+        </p:spPr>
+        <p:txBody>
+          <a:bodyPr wrap="square" rtlCol="0">
+            <a:spAutoFit/>
+          </a:bodyPr>
+          <a:lstStyle/>
+          <a:p>
+            <a:pPr>
+              <a:lnSpc>
+                <a:spcPts val="900"/>
+              </a:lnSpc>
+            </a:pPr>
+            <a:r>
+              <a:rPr lang="en-GB" sz="1000" dirty="0"/>
+              <a:t>Seeds</a:t>
+            </a:r>
+          </a:p>
+          <a:p>
+            <a:pPr>
+              <a:lnSpc>
+                <a:spcPts val="900"/>
+              </a:lnSpc>
+            </a:pPr>
+            <a:r>
+              <a:rPr lang="en-GB" sz="1000" dirty="0"/>
+              <a:t>only</a:t>
+            </a:r>
+            <a:endParaRPr lang="en-US" sz="1000" dirty="0"/>
           </a:p>
         </p:txBody>
       </p:sp>
     </p:spTree>
     <p:extLst>
       <p:ext uri="{BB962C8B-B14F-4D97-AF65-F5344CB8AC3E}">
-        <p14:creationId xmlns:p14="http://schemas.microsoft.com/office/powerpoint/2010/main" val="89305629"/>
+        <p14:creationId xmlns:p14="http://schemas.microsoft.com/office/powerpoint/2010/main" val="3765125029"/>
       </p:ext>
     </p:extLst>
   </p:cSld>
